--- a/Paket Pertamina/00_Presentasi_VP/Presentasi_Progres_GLD_Sertifikasi_FieldTesting_Sep2026.pptx
+++ b/Paket Pertamina/00_Presentasi_VP/Presentasi_Progres_GLD_Sertifikasi_FieldTesting_Sep2026.pptx
@@ -7318,8 +7318,1564 @@
 </p:sld>
 </file>
 
-<file path=ppt/slides/slide7.xml><?xml version="1.0" encoding="UTF-8" standalone="yes"?>
-<p:sld xmlns:a="http://schemas.openxmlformats.org/drawingml/2006/main" xmlns:r="http://schemas.openxmlformats.org/officeDocument/2006/relationships" xmlns:p="http://schemas.openxmlformats.org/presentationml/2006/main"><p:cSld name="Slide 7"><p:bg><p:bgPr><a:solidFill><a:srgbClr val="FFFFFF"/></a:solidFill></p:bgPr></p:bg><p:spTree><p:nvGrpSpPr><p:cNvPr id="1" name=""/><p:cNvGrpSpPr/><p:nvPr/></p:nvGrpSpPr><p:grpSpPr><a:xfrm><a:off x="0" y="0"/><a:ext cx="0" cy="0"/><a:chOff x="0" y="0"/><a:chExt cx="0" cy="0"/></a:xfrm></p:grpSpPr><p:sp><p:nvSpPr><p:cNvPr id="2" name="Text 0"></p:cNvPr><p:cNvSpPr/><p:nvPr></p:nvPr></p:nvSpPr><p:spPr><a:xfrm><a:off x="548640" y="457200"/><a:ext cx="7315200" cy="320040"/></a:xfrm><a:prstGeom prst="rect"><a:avLst></a:avLst></a:prstGeom><a:noFill/><a:ln></a:ln></p:spPr><p:txBody><a:bodyPr wrap="square" rtlCol="0" anchor="ctr"></a:bodyPr><a:lstStyle/><a:p><a:pPr indent="0" marL="0"><a:buNone/></a:pPr><a:r><a:rPr lang="en-US" sz="1200" b="1" spc="200" kern="0" dirty="0"><a:solidFill><a:srgbClr val="38C0EF"/></a:solidFill><a:latin typeface="Calibri" pitchFamily="34" charset="0"/><a:ea typeface="Calibri" pitchFamily="34" charset="-122"/><a:cs typeface="Calibri" pitchFamily="34" charset="-120"/></a:rPr><a:t>OUTSTANDING &amp; KOLABORASI LAIN</a:t></a:r><a:endParaRPr lang="en-US" sz="1200" dirty="0"/></a:p></p:txBody></p:sp><p:sp><p:nvSpPr><p:cNvPr id="3" name="Text 1"></p:cNvPr><p:cNvSpPr txBox="1"/><p:nvPr></p:nvPr></p:nvSpPr><p:spPr><a:xfrm><a:off x="548640" y="749808"/><a:ext cx="11091672" cy="640080"/></a:xfrm><a:prstGeom prst="rect"><a:avLst></a:avLst></a:prstGeom><a:noFill/><a:ln></a:ln></p:spPr><p:txBody><a:bodyPr wrap="square" rtlCol="0" anchor="ctr"></a:bodyPr><a:lstStyle/><a:p><a:pPr indent="0" marL="0"><a:buNone/></a:pPr><a:r><a:rPr lang="en-US" sz="3000" b="1" dirty="0"><a:solidFill><a:srgbClr val="002B5F"/></a:solidFill><a:latin typeface="Cambria" pitchFamily="34" charset="0"/><a:ea typeface="Cambria" pitchFamily="34" charset="-122"/><a:cs typeface="Cambria" pitchFamily="34" charset="-120"/></a:rPr><a:t>Ringkasan Outstanding Item</a:t></a:r><a:endParaRPr lang="en-US" sz="3000" dirty="0"/></a:p></p:txBody></p:sp><p:sp><p:nvSpPr><p:cNvPr id="4" name="Text 2"></p:cNvPr><p:cNvSpPr txBox="1"/><p:nvPr></p:nvPr></p:nvSpPr><p:spPr><a:xfrm><a:off x="548640" y="1298448"/><a:ext cx="11091672" cy="365760"/></a:xfrm><a:prstGeom prst="rect"><a:avLst></a:avLst></a:prstGeom><a:noFill/><a:ln></a:ln></p:spPr><p:txBody><a:bodyPr wrap="square" rtlCol="0" anchor="ctr"></a:bodyPr><a:lstStyle/><a:p><a:pPr indent="0" marL="0"><a:buNone/></a:pPr><a:r><a:rPr lang="en-US" sz="1400" dirty="0"><a:solidFill><a:srgbClr val="5B6B82"/></a:solidFill><a:latin typeface="Calibri" pitchFamily="34" charset="0"/><a:ea typeface="Calibri" pitchFamily="34" charset="-122"/><a:cs typeface="Calibri" pitchFamily="34" charset="-120"/></a:rPr><a:t>Seluruh gate ditampilkan apa adanya, termasuk yang belum ada jawaban dari Pertamina</a:t></a:r><a:endParaRPr lang="en-US" sz="1400" dirty="0"/></a:p></p:txBody></p:sp><p:sp><p:nvSpPr><p:cNvPr id="5" name="Shape 3"></p:cNvPr><p:cNvSpPr/><p:nvPr></p:nvPr></p:nvSpPr><p:spPr><a:xfrm><a:off x="548640" y="1874520"/><a:ext cx="11091672" cy="365760"/></a:xfrm><a:prstGeom prst="rect"><a:avLst></a:avLst></a:prstGeom><a:solidFill><a:srgbClr val="002B5F"/></a:solidFill><a:ln></a:ln></p:spPr></p:sp><p:sp><p:nvSpPr><p:cNvPr id="6" name="Text 4"></p:cNvPr><p:cNvSpPr txBox="1"/><p:nvPr></p:nvPr></p:nvSpPr><p:spPr><a:xfrm><a:off x="685800" y="1874520"/><a:ext cx="3154680" cy="365760"/></a:xfrm><a:prstGeom prst="rect"><a:avLst></a:avLst></a:prstGeom><a:noFill/><a:ln></a:ln></p:spPr><p:txBody><a:bodyPr wrap="square" lIns="0" tIns="0" rIns="0" bIns="0" rtlCol="0" anchor="ctr"></a:bodyPr><a:lstStyle/><a:p><a:pPr indent="0" marL="0"><a:buNone/></a:pPr><a:r><a:rPr lang="en-US" sz="1050" b="1" dirty="0"><a:solidFill><a:srgbClr val="FFFFFF"/></a:solidFill><a:latin typeface="Calibri" pitchFamily="34" charset="0"/><a:ea typeface="Calibri" pitchFamily="34" charset="-122"/><a:cs typeface="Calibri" pitchFamily="34" charset="-120"/></a:rPr><a:t>Gate</a:t></a:r><a:endParaRPr lang="en-US" sz="1050" dirty="0"/></a:p></p:txBody></p:sp><p:sp><p:nvSpPr><p:cNvPr id="7" name="Text 5"></p:cNvPr><p:cNvSpPr txBox="1"/><p:nvPr></p:nvPr></p:nvSpPr><p:spPr><a:xfrm><a:off x="3977640" y="1874520"/><a:ext cx="2606040" cy="365760"/></a:xfrm><a:prstGeom prst="rect"><a:avLst></a:avLst></a:prstGeom><a:noFill/><a:ln></a:ln></p:spPr><p:txBody><a:bodyPr wrap="square" lIns="0" tIns="0" rIns="0" bIns="0" rtlCol="0" anchor="ctr"></a:bodyPr><a:lstStyle/><a:p><a:pPr indent="0" marL="0"><a:buNone/></a:pPr><a:r><a:rPr lang="en-US" sz="1050" b="1" dirty="0"><a:solidFill><a:srgbClr val="FFFFFF"/></a:solidFill><a:latin typeface="Calibri" pitchFamily="34" charset="0"/><a:ea typeface="Calibri" pitchFamily="34" charset="-122"/><a:cs typeface="Calibri" pitchFamily="34" charset="-120"/></a:rPr><a:t>Kategori</a:t></a:r><a:endParaRPr lang="en-US" sz="1050" dirty="0"/></a:p></p:txBody></p:sp><p:sp><p:nvSpPr><p:cNvPr id="8" name="Text 6"></p:cNvPr><p:cNvSpPr txBox="1"/><p:nvPr></p:nvPr></p:nvSpPr><p:spPr><a:xfrm><a:off x="6720840" y="1874520"/><a:ext cx="4919472" cy="365760"/></a:xfrm><a:prstGeom prst="rect"><a:avLst></a:avLst></a:prstGeom><a:noFill/><a:ln></a:ln></p:spPr><p:txBody><a:bodyPr wrap="square" lIns="0" tIns="0" rIns="0" bIns="0" rtlCol="0" anchor="ctr"></a:bodyPr><a:lstStyle/><a:p><a:pPr indent="0" marL="0"><a:buNone/></a:pPr><a:r><a:rPr lang="en-US" sz="1050" b="1" dirty="0"><a:solidFill><a:srgbClr val="FFFFFF"/></a:solidFill><a:latin typeface="Calibri" pitchFamily="34" charset="0"/><a:ea typeface="Calibri" pitchFamily="34" charset="-122"/><a:cs typeface="Calibri" pitchFamily="34" charset="-120"/></a:rPr><a:t>Status</a:t></a:r><a:endParaRPr lang="en-US" sz="1050" dirty="0"/></a:p></p:txBody></p:sp><p:sp><p:nvSpPr><p:cNvPr id="9" name="Shape 7"></p:cNvPr><p:cNvSpPr/><p:nvPr></p:nvPr></p:nvSpPr><p:spPr><a:xfrm><a:off x="548640" y="2267712"/><a:ext cx="11091672" cy="365760"/></a:xfrm><a:prstGeom prst="rect"><a:avLst></a:avLst></a:prstGeom><a:solidFill><a:srgbClr val="FFFFFF"/></a:solidFill><a:ln></a:ln></p:spPr></p:sp><p:sp><p:nvSpPr><p:cNvPr id="10" name="Text 8"></p:cNvPr><p:cNvSpPr txBox="1"/><p:nvPr></p:nvPr></p:nvSpPr><p:spPr><a:xfrm><a:off x="685800" y="2267712"/><a:ext cx="3154680" cy="365760"/></a:xfrm><a:prstGeom prst="rect"><a:avLst></a:avLst></a:prstGeom><a:noFill/><a:ln></a:ln></p:spPr><p:txBody><a:bodyPr wrap="square" lIns="0" tIns="0" rIns="0" bIns="0" rtlCol="0" anchor="ctr"></a:bodyPr><a:lstStyle/><a:p><a:pPr indent="0" marL="0"><a:buNone/></a:pPr><a:r><a:rPr lang="en-US" sz="1000" dirty="0"><a:solidFill><a:srgbClr val="002B5F"/></a:solidFill><a:latin typeface="Calibri" pitchFamily="34" charset="0"/><a:ea typeface="Calibri" pitchFamily="34" charset="-122"/><a:cs typeface="Calibri" pitchFamily="34" charset="-120"/></a:rPr><a:t>gate:atex-scoping</a:t></a:r><a:endParaRPr lang="en-US" sz="1000" dirty="0"/></a:p></p:txBody></p:sp><p:sp><p:nvSpPr><p:cNvPr id="11" name="Text 9"></p:cNvPr><p:cNvSpPr txBox="1"/><p:nvPr></p:nvPr></p:nvSpPr><p:spPr><a:xfrm><a:off x="3977640" y="2267712"/><a:ext cx="2606040" cy="365760"/></a:xfrm><a:prstGeom prst="rect"><a:avLst></a:avLst></a:prstGeom><a:noFill/><a:ln></a:ln></p:spPr><p:txBody><a:bodyPr wrap="square" lIns="0" tIns="0" rIns="0" bIns="0" rtlCol="0" anchor="ctr"></a:bodyPr><a:lstStyle/><a:p><a:pPr indent="0" marL="0"><a:buNone/></a:pPr><a:r><a:rPr lang="en-US" sz="1000" dirty="0"><a:solidFill><a:srgbClr val="1A1F2B"/></a:solidFill><a:latin typeface="Calibri" pitchFamily="34" charset="0"/><a:ea typeface="Calibri" pitchFamily="34" charset="-122"/><a:cs typeface="Calibri" pitchFamily="34" charset="-120"/></a:rPr><a:t>Sertifikasi</a:t></a:r><a:endParaRPr lang="en-US" sz="1000" dirty="0"/></a:p></p:txBody></p:sp><p:sp><p:nvSpPr><p:cNvPr id="12" name="Text 10"></p:cNvPr><p:cNvSpPr txBox="1"/><p:nvPr></p:nvPr></p:nvSpPr><p:spPr><a:xfrm><a:off x="6720840" y="2267712"/><a:ext cx="4919472" cy="365760"/></a:xfrm><a:prstGeom prst="rect"><a:avLst></a:avLst></a:prstGeom><a:noFill/><a:ln></a:ln></p:spPr><p:txBody><a:bodyPr wrap="square" lIns="0" tIns="0" rIns="0" bIns="0" rtlCol="0" anchor="ctr"></a:bodyPr><a:lstStyle/><a:p><a:pPr indent="0" marL="0"><a:buNone/></a:pPr><a:r><a:rPr lang="en-US" sz="1000" dirty="0"><a:solidFill><a:srgbClr val="1A1F2B"/></a:solidFill><a:latin typeface="Calibri" pitchFamily="34" charset="0"/><a:ea typeface="Calibri" pitchFamily="34" charset="-122"/><a:cs typeface="Calibri" pitchFamily="34" charset="-120"/></a:rPr><a:t>Zona/kelas suhu ditargetkan; grup gas & proteksi terbuka</a:t></a:r><a:endParaRPr lang="en-US" sz="1000" dirty="0"/></a:p></p:txBody></p:sp><p:sp><p:nvSpPr><p:cNvPr id="13" name="Shape 11"></p:cNvPr><p:cNvSpPr/><p:nvPr></p:nvPr></p:nvSpPr><p:spPr><a:xfrm><a:off x="548640" y="2660904"/><a:ext cx="11091672" cy="365760"/></a:xfrm><a:prstGeom prst="rect"><a:avLst></a:avLst></a:prstGeom><a:solidFill><a:srgbClr val="F4F7FB"/></a:solidFill><a:ln></a:ln></p:spPr></p:sp><p:sp><p:nvSpPr><p:cNvPr id="14" name="Text 12"></p:cNvPr><p:cNvSpPr txBox="1"/><p:nvPr></p:nvPr></p:nvSpPr><p:spPr><a:xfrm><a:off x="685800" y="2660904"/><a:ext cx="3154680" cy="365760"/></a:xfrm><a:prstGeom prst="rect"><a:avLst></a:avLst></a:prstGeom><a:noFill/><a:ln></a:ln></p:spPr><p:txBody><a:bodyPr wrap="square" lIns="0" tIns="0" rIns="0" bIns="0" rtlCol="0" anchor="ctr"></a:bodyPr><a:lstStyle/><a:p><a:pPr indent="0" marL="0"><a:buNone/></a:pPr><a:r><a:rPr lang="en-US" sz="1000" dirty="0"><a:solidFill><a:srgbClr val="002B5F"/></a:solidFill><a:latin typeface="Calibri" pitchFamily="34" charset="0"/><a:ea typeface="Calibri" pitchFamily="34" charset="-122"/><a:cs typeface="Calibri" pitchFamily="34" charset="-120"/></a:rPr><a:t>gate:gas-extra</a:t></a:r><a:endParaRPr lang="en-US" sz="1000" dirty="0"/></a:p></p:txBody></p:sp><p:sp><p:nvSpPr><p:cNvPr id="15" name="Text 13"></p:cNvPr><p:cNvSpPr txBox="1"/><p:nvPr></p:nvPr></p:nvSpPr><p:spPr><a:xfrm><a:off x="3977640" y="2660904"/><a:ext cx="2606040" cy="365760"/></a:xfrm><a:prstGeom prst="rect"><a:avLst></a:avLst></a:prstGeom><a:noFill/><a:ln></a:ln></p:spPr><p:txBody><a:bodyPr wrap="square" lIns="0" tIns="0" rIns="0" bIns="0" rtlCol="0" anchor="ctr"></a:bodyPr><a:lstStyle/><a:p><a:pPr indent="0" marL="0"><a:buNone/></a:pPr><a:r><a:rPr lang="en-US" sz="1000" dirty="0"><a:solidFill><a:srgbClr val="1A1F2B"/></a:solidFill><a:latin typeface="Calibri" pitchFamily="34" charset="0"/><a:ea typeface="Calibri" pitchFamily="34" charset="-122"/><a:cs typeface="Calibri" pitchFamily="34" charset="-120"/></a:rPr><a:t>Kapabilitas Gas</a:t></a:r><a:endParaRPr lang="en-US" sz="1000" dirty="0"/></a:p></p:txBody></p:sp><p:sp><p:nvSpPr><p:cNvPr id="16" name="Text 14"></p:cNvPr><p:cNvSpPr txBox="1"/><p:nvPr></p:nvPr></p:nvSpPr><p:spPr><a:xfrm><a:off x="6720840" y="2660904"/><a:ext cx="4919472" cy="365760"/></a:xfrm><a:prstGeom prst="rect"><a:avLst></a:avLst></a:prstGeom><a:noFill/><a:ln></a:ln></p:spPr><p:txBody><a:bodyPr wrap="square" lIns="0" tIns="0" rIns="0" bIns="0" rtlCol="0" anchor="ctr"></a:bodyPr><a:lstStyle/><a:p><a:pPr indent="0" marL="0"><a:buNone/></a:pPr><a:r><a:rPr lang="en-US" sz="1000" dirty="0"><a:solidFill><a:srgbClr val="1A1F2B"/></a:solidFill><a:latin typeface="Calibri" pitchFamily="34" charset="0"/><a:ea typeface="Calibri" pitchFamily="34" charset="-122"/><a:cs typeface="Calibri" pitchFamily="34" charset="-120"/></a:rPr><a:t>Menunggu sampel Benzena/CO/H2S</a:t></a:r><a:endParaRPr lang="en-US" sz="1000" dirty="0"/></a:p></p:txBody></p:sp><p:sp><p:nvSpPr><p:cNvPr id="17" name="Shape 15"></p:cNvPr><p:cNvSpPr/><p:nvPr></p:nvPr></p:nvSpPr><p:spPr><a:xfrm><a:off x="548640" y="3054096"/><a:ext cx="11091672" cy="365760"/></a:xfrm><a:prstGeom prst="rect"><a:avLst></a:avLst></a:prstGeom><a:solidFill><a:srgbClr val="FFFFFF"/></a:solidFill><a:ln></a:ln></p:spPr></p:sp><p:sp><p:nvSpPr><p:cNvPr id="18" name="Text 16"></p:cNvPr><p:cNvSpPr txBox="1"/><p:nvPr></p:nvPr></p:nvSpPr><p:spPr><a:xfrm><a:off x="685800" y="3054096"/><a:ext cx="3154680" cy="365760"/></a:xfrm><a:prstGeom prst="rect"><a:avLst></a:avLst></a:prstGeom><a:noFill/><a:ln></a:ln></p:spPr><p:txBody><a:bodyPr wrap="square" lIns="0" tIns="0" rIns="0" bIns="0" rtlCol="0" anchor="ctr"></a:bodyPr><a:lstStyle/><a:p><a:pPr indent="0" marL="0"><a:buNone/></a:pPr><a:r><a:rPr lang="en-US" sz="1000" dirty="0"><a:solidFill><a:srgbClr val="002B5F"/></a:solidFill><a:latin typeface="Calibri" pitchFamily="34" charset="0"/><a:ea typeface="Calibri" pitchFamily="34" charset="-122"/><a:cs typeface="Calibri" pitchFamily="34" charset="-120"/></a:rPr><a:t>gate:cert-height</a:t></a:r><a:endParaRPr lang="en-US" sz="1000" dirty="0"/></a:p></p:txBody></p:sp><p:sp><p:nvSpPr><p:cNvPr id="19" name="Text 17"></p:cNvPr><p:cNvSpPr txBox="1"/><p:nvPr></p:nvPr></p:nvSpPr><p:spPr><a:xfrm><a:off x="3977640" y="3054096"/><a:ext cx="2606040" cy="365760"/></a:xfrm><a:prstGeom prst="rect"><a:avLst></a:avLst></a:prstGeom><a:noFill/><a:ln></a:ln></p:spPr><p:txBody><a:bodyPr wrap="square" lIns="0" tIns="0" rIns="0" bIns="0" rtlCol="0" anchor="ctr"></a:bodyPr><a:lstStyle/><a:p><a:pPr indent="0" marL="0"><a:buNone/></a:pPr><a:r><a:rPr lang="en-US" sz="1000" dirty="0"><a:solidFill><a:srgbClr val="1A1F2B"/></a:solidFill><a:latin typeface="Calibri" pitchFamily="34" charset="0"/><a:ea typeface="Calibri" pitchFamily="34" charset="-122"/><a:cs typeface="Calibri" pitchFamily="34" charset="-120"/></a:rPr><a:t>Sertifikasi</a:t></a:r><a:endParaRPr lang="en-US" sz="1000" dirty="0"/></a:p></p:txBody></p:sp><p:sp><p:nvSpPr><p:cNvPr id="20" name="Text 18"></p:cNvPr><p:cNvSpPr txBox="1"/><p:nvPr></p:nvPr></p:nvSpPr><p:spPr><a:xfrm><a:off x="6720840" y="3054096"/><a:ext cx="4919472" cy="365760"/></a:xfrm><a:prstGeom prst="rect"><a:avLst></a:avLst></a:prstGeom><a:noFill/><a:ln></a:ln></p:spPr><p:txBody><a:bodyPr wrap="square" lIns="0" tIns="0" rIns="0" bIns="0" rtlCol="0" anchor="ctr"></a:bodyPr><a:lstStyle/><a:p><a:pPr indent="0" marL="0"><a:buNone/></a:pPr><a:r><a:rPr lang="en-US" sz="1000" dirty="0"><a:solidFill><a:srgbClr val="1A1F2B"/></a:solidFill><a:latin typeface="Calibri" pitchFamily="34" charset="0"/><a:ea typeface="Calibri" pitchFamily="34" charset="-122"/><a:cs typeface="Calibri" pitchFamily="34" charset="-120"/></a:rPr><a:t>Instalasi tinggi belum tersertifikasi</a:t></a:r><a:endParaRPr lang="en-US" sz="1000" dirty="0"/></a:p></p:txBody></p:sp><p:sp><p:nvSpPr><p:cNvPr id="21" name="Shape 19"></p:cNvPr><p:cNvSpPr/><p:nvPr></p:nvPr></p:nvSpPr><p:spPr><a:xfrm><a:off x="548640" y="3447288"/><a:ext cx="11091672" cy="365760"/></a:xfrm><a:prstGeom prst="rect"><a:avLst></a:avLst></a:prstGeom><a:solidFill><a:srgbClr val="F4F7FB"/></a:solidFill><a:ln></a:ln></p:spPr></p:sp><p:sp><p:nvSpPr><p:cNvPr id="22" name="Text 20"></p:cNvPr><p:cNvSpPr txBox="1"/><p:nvPr></p:nvPr></p:nvSpPr><p:spPr><a:xfrm><a:off x="685800" y="3447288"/><a:ext cx="3154680" cy="365760"/></a:xfrm><a:prstGeom prst="rect"><a:avLst></a:avLst></a:prstGeom><a:noFill/><a:ln></a:ln></p:spPr><p:txBody><a:bodyPr wrap="square" lIns="0" tIns="0" rIns="0" bIns="0" rtlCol="0" anchor="ctr"></a:bodyPr><a:lstStyle/><a:p><a:pPr indent="0" marL="0"><a:buNone/></a:pPr><a:r><a:rPr lang="en-US" sz="1000" dirty="0"><a:solidFill><a:srgbClr val="002B5F"/></a:solidFill><a:latin typeface="Calibri" pitchFamily="34" charset="0"/><a:ea typeface="Calibri" pitchFamily="34" charset="-122"/><a:cs typeface="Calibri" pitchFamily="34" charset="-120"/></a:rPr><a:t>gate:ch-batt-safety</a:t></a:r><a:endParaRPr lang="en-US" sz="1000" dirty="0"/></a:p></p:txBody></p:sp><p:sp><p:nvSpPr><p:cNvPr id="23" name="Text 21"></p:cNvPr><p:cNvSpPr txBox="1"/><p:nvPr></p:nvPr></p:nvSpPr><p:spPr><a:xfrm><a:off x="3977640" y="3447288"/><a:ext cx="2606040" cy="365760"/></a:xfrm><a:prstGeom prst="rect"><a:avLst></a:avLst></a:prstGeom><a:noFill/><a:ln></a:ln></p:spPr><p:txBody><a:bodyPr wrap="square" lIns="0" tIns="0" rIns="0" bIns="0" rtlCol="0" anchor="ctr"></a:bodyPr><a:lstStyle/><a:p><a:pPr indent="0" marL="0"><a:buNone/></a:pPr><a:r><a:rPr lang="en-US" sz="1000" dirty="0"><a:solidFill><a:srgbClr val="1A1F2B"/></a:solidFill><a:latin typeface="Calibri" pitchFamily="34" charset="0"/><a:ea typeface="Calibri" pitchFamily="34" charset="-122"/><a:cs typeface="Calibri" pitchFamily="34" charset="-120"/></a:rPr><a:t>Sertifikasi</a:t></a:r><a:endParaRPr lang="en-US" sz="1000" dirty="0"/></a:p></p:txBody></p:sp><p:sp><p:nvSpPr><p:cNvPr id="24" name="Text 22"></p:cNvPr><p:cNvSpPr txBox="1"/><p:nvPr></p:nvPr></p:nvSpPr><p:spPr><a:xfrm><a:off x="6720840" y="3447288"/><a:ext cx="4919472" cy="365760"/></a:xfrm><a:prstGeom prst="rect"><a:avLst></a:avLst></a:prstGeom><a:noFill/><a:ln></a:ln></p:spPr><p:txBody><a:bodyPr wrap="square" lIns="0" tIns="0" rIns="0" bIns="0" rtlCol="0" anchor="ctr"></a:bodyPr><a:lstStyle/><a:p><a:pPr indent="0" marL="0"><a:buNone/></a:pPr><a:r><a:rPr lang="en-US" sz="1000" dirty="0"><a:solidFill><a:srgbClr val="1A1F2B"/></a:solidFill><a:latin typeface="Calibri" pitchFamily="34" charset="0"/><a:ea typeface="Calibri" pitchFamily="34" charset="-122"/><a:cs typeface="Calibri" pitchFamily="34" charset="-120"/></a:rPr><a:t>Baterai CH &amp; Node Sensor belum Ex-verified</a:t></a:r><a:endParaRPr lang="en-US" sz="1000" dirty="0"/></a:p></p:txBody></p:sp><p:sp><p:nvSpPr><p:cNvPr id="25" name="Shape 23"></p:cNvPr><p:cNvSpPr/><p:nvPr></p:nvPr></p:nvSpPr><p:spPr><a:xfrm><a:off x="548640" y="3840480"/><a:ext cx="11091672" cy="365760"/></a:xfrm><a:prstGeom prst="rect"><a:avLst></a:avLst></a:prstGeom><a:solidFill><a:srgbClr val="FFFFFF"/></a:solidFill><a:ln></a:ln></p:spPr></p:sp><p:sp><p:nvSpPr><p:cNvPr id="26" name="Text 24"></p:cNvPr><p:cNvSpPr txBox="1"/><p:nvPr></p:nvPr></p:nvSpPr><p:spPr><a:xfrm><a:off x="685800" y="3840480"/><a:ext cx="3154680" cy="365760"/></a:xfrm><a:prstGeom prst="rect"><a:avLst></a:avLst></a:prstGeom><a:noFill/><a:ln></a:ln></p:spPr><p:txBody><a:bodyPr wrap="square" lIns="0" tIns="0" rIns="0" bIns="0" rtlCol="0" anchor="ctr"></a:bodyPr><a:lstStyle/><a:p><a:pPr indent="0" marL="0"><a:buNone/></a:pPr><a:r><a:rPr lang="en-US" sz="1000" dirty="0"><a:solidFill><a:srgbClr val="002B5F"/></a:solidFill><a:latin typeface="Calibri" pitchFamily="34" charset="0"/><a:ea typeface="Calibri" pitchFamily="34" charset="-122"/><a:cs typeface="Calibri" pitchFamily="34" charset="-120"/></a:rPr><a:t>gate:jsa</a:t></a:r><a:endParaRPr lang="en-US" sz="1000" dirty="0"/></a:p></p:txBody></p:sp><p:sp><p:nvSpPr><p:cNvPr id="27" name="Text 25"></p:cNvPr><p:cNvSpPr txBox="1"/><p:nvPr></p:nvPr></p:nvSpPr><p:spPr><a:xfrm><a:off x="3977640" y="3840480"/><a:ext cx="2606040" cy="365760"/></a:xfrm><a:prstGeom prst="rect"><a:avLst></a:avLst></a:prstGeom><a:noFill/><a:ln></a:ln></p:spPr><p:txBody><a:bodyPr wrap="square" lIns="0" tIns="0" rIns="0" bIns="0" rtlCol="0" anchor="ctr"></a:bodyPr><a:lstStyle/><a:p><a:pPr indent="0" marL="0"><a:buNone/></a:pPr><a:r><a:rPr lang="en-US" sz="1000" dirty="0"><a:solidFill><a:srgbClr val="1A1F2B"/></a:solidFill><a:latin typeface="Calibri" pitchFamily="34" charset="0"/><a:ea typeface="Calibri" pitchFamily="34" charset="-122"/><a:cs typeface="Calibri" pitchFamily="34" charset="-120"/></a:rPr><a:t>Field Testing</a:t></a:r><a:endParaRPr lang="en-US" sz="1000" dirty="0"/></a:p></p:txBody></p:sp><p:sp><p:nvSpPr><p:cNvPr id="28" name="Text 26"></p:cNvPr><p:cNvSpPr txBox="1"/><p:nvPr></p:nvPr></p:nvSpPr><p:spPr><a:xfrm><a:off x="6720840" y="3840480"/><a:ext cx="4919472" cy="365760"/></a:xfrm><a:prstGeom prst="rect"><a:avLst></a:avLst></a:prstGeom><a:noFill/><a:ln></a:ln></p:spPr><p:txBody><a:bodyPr wrap="square" lIns="0" tIns="0" rIns="0" bIns="0" rtlCol="0" anchor="ctr"></a:bodyPr><a:lstStyle/><a:p><a:pPr indent="0" marL="0"><a:buNone/></a:pPr><a:r><a:rPr lang="en-US" sz="1000" dirty="0"><a:solidFill><a:srgbClr val="1A1F2B"/></a:solidFill><a:latin typeface="Calibri" pitchFamily="34" charset="0"/><a:ea typeface="Calibri" pitchFamily="34" charset="-122"/><a:cs typeface="Calibri" pitchFamily="34" charset="-120"/></a:rPr><a:t>TRA/JSA belum disusun</a:t></a:r><a:endParaRPr lang="en-US" sz="1000" dirty="0"/></a:p></p:txBody></p:sp><p:sp><p:nvSpPr><p:cNvPr id="29" name="Shape 27"></p:cNvPr><p:cNvSpPr/><p:nvPr></p:nvPr></p:nvSpPr><p:spPr><a:xfrm><a:off x="548640" y="4233672"/><a:ext cx="11091672" cy="365760"/></a:xfrm><a:prstGeom prst="rect"><a:avLst></a:avLst></a:prstGeom><a:solidFill><a:srgbClr val="F4F7FB"/></a:solidFill><a:ln></a:ln></p:spPr></p:sp><p:sp><p:nvSpPr><p:cNvPr id="30" name="Text 28"></p:cNvPr><p:cNvSpPr txBox="1"/><p:nvPr></p:nvPr></p:nvSpPr><p:spPr><a:xfrm><a:off x="685800" y="4233672"/><a:ext cx="3154680" cy="365760"/></a:xfrm><a:prstGeom prst="rect"><a:avLst></a:avLst></a:prstGeom><a:noFill/><a:ln></a:ln></p:spPr><p:txBody><a:bodyPr wrap="square" lIns="0" tIns="0" rIns="0" bIns="0" rtlCol="0" anchor="ctr"></a:bodyPr><a:lstStyle/><a:p><a:pPr indent="0" marL="0"><a:buNone/></a:pPr><a:r><a:rPr lang="en-US" sz="1000" dirty="0"><a:solidFill><a:srgbClr val="002B5F"/></a:solidFill><a:latin typeface="Calibri" pitchFamily="34" charset="0"/><a:ea typeface="Calibri" pitchFamily="34" charset="-122"/><a:cs typeface="Calibri" pitchFamily="34" charset="-120"/></a:rPr><a:t>gate:net-registration</a:t></a:r><a:endParaRPr lang="en-US" sz="1000" dirty="0"/></a:p></p:txBody></p:sp><p:sp><p:nvSpPr><p:cNvPr id="31" name="Text 29"></p:cNvPr><p:cNvSpPr txBox="1"/><p:nvPr></p:nvPr></p:nvSpPr><p:spPr><a:xfrm><a:off x="3977640" y="4233672"/><a:ext cx="2606040" cy="365760"/></a:xfrm><a:prstGeom prst="rect"><a:avLst></a:avLst></a:prstGeom><a:noFill/><a:ln></a:ln></p:spPr><p:txBody><a:bodyPr wrap="square" lIns="0" tIns="0" rIns="0" bIns="0" rtlCol="0" anchor="ctr"></a:bodyPr><a:lstStyle/><a:p><a:pPr indent="0" marL="0"><a:buNone/></a:pPr><a:r><a:rPr lang="en-US" sz="1000" dirty="0"><a:solidFill><a:srgbClr val="1A1F2B"/></a:solidFill><a:latin typeface="Calibri" pitchFamily="34" charset="0"/><a:ea typeface="Calibri" pitchFamily="34" charset="-122"/><a:cs typeface="Calibri" pitchFamily="34" charset="-120"/></a:rPr><a:t>Field Testing</a:t></a:r><a:endParaRPr lang="en-US" sz="1000" dirty="0"/></a:p></p:txBody></p:sp><p:sp><p:nvSpPr><p:cNvPr id="32" name="Text 30"></p:cNvPr><p:cNvSpPr txBox="1"/><p:nvPr></p:nvPr></p:nvSpPr><p:spPr><a:xfrm><a:off x="6720840" y="4233672"/><a:ext cx="4919472" cy="365760"/></a:xfrm><a:prstGeom prst="rect"><a:avLst></a:avLst></a:prstGeom><a:noFill/><a:ln></a:ln></p:spPr><p:txBody><a:bodyPr wrap="square" lIns="0" tIns="0" rIns="0" bIns="0" rtlCol="0" anchor="ctr"></a:bodyPr><a:lstStyle/><a:p><a:pPr indent="0" marL="0"><a:buNone/></a:pPr><a:r><a:rPr lang="en-US" sz="1000" dirty="0"><a:solidFill><a:srgbClr val="1A1F2B"/></a:solidFill><a:latin typeface="Calibri" pitchFamily="34" charset="0"/><a:ea typeface="Calibri" pitchFamily="34" charset="-122"/><a:cs typeface="Calibri" pitchFamily="34" charset="-120"/></a:rPr><a:t>Selesai — jaringan field independen (LGU)</a:t></a:r><a:endParaRPr lang="en-US" sz="1000" dirty="0"/></a:p></p:txBody></p:sp><p:sp><p:nvSpPr><p:cNvPr id="33" name="Shape 31"></p:cNvPr><p:cNvSpPr/><p:nvPr></p:nvPr></p:nvSpPr><p:spPr><a:xfrm><a:off x="548640" y="4626864"/><a:ext cx="11091672" cy="365760"/></a:xfrm><a:prstGeom prst="rect"><a:avLst></a:avLst></a:prstGeom><a:solidFill><a:srgbClr val="FFFFFF"/></a:solidFill><a:ln></a:ln></p:spPr></p:sp><p:sp><p:nvSpPr><p:cNvPr id="34" name="Text 32"></p:cNvPr><p:cNvSpPr txBox="1"/><p:nvPr></p:nvPr></p:nvSpPr><p:spPr><a:xfrm><a:off x="685800" y="4626864"/><a:ext cx="3154680" cy="365760"/></a:xfrm><a:prstGeom prst="rect"><a:avLst></a:avLst></a:prstGeom><a:noFill/><a:ln></a:ln></p:spPr><p:txBody><a:bodyPr wrap="square" lIns="0" tIns="0" rIns="0" bIns="0" rtlCol="0" anchor="ctr"></a:bodyPr><a:lstStyle/><a:p><a:pPr indent="0" marL="0"><a:buNone/></a:pPr><a:r><a:rPr lang="en-US" sz="1000" dirty="0"><a:solidFill><a:srgbClr val="002B5F"/></a:solidFill><a:latin typeface="Calibri" pitchFamily="34" charset="0"/><a:ea typeface="Calibri" pitchFamily="34" charset="-122"/><a:cs typeface="Calibri" pitchFamily="34" charset="-120"/></a:rPr><a:t>gate:server-spec</a:t></a:r><a:endParaRPr lang="en-US" sz="1000" dirty="0"/></a:p></p:txBody></p:sp><p:sp><p:nvSpPr><p:cNvPr id="35" name="Text 33"></p:cNvPr><p:cNvSpPr txBox="1"/><p:nvPr></p:nvPr></p:nvSpPr><p:spPr><a:xfrm><a:off x="3977640" y="4626864"/><a:ext cx="2606040" cy="365760"/></a:xfrm><a:prstGeom prst="rect"><a:avLst></a:avLst></a:prstGeom><a:noFill/><a:ln></a:ln></p:spPr><p:txBody><a:bodyPr wrap="square" lIns="0" tIns="0" rIns="0" bIns="0" rtlCol="0" anchor="ctr"></a:bodyPr><a:lstStyle/><a:p><a:pPr indent="0" marL="0"><a:buNone/></a:pPr><a:r><a:rPr lang="en-US" sz="1000" dirty="0"><a:solidFill><a:srgbClr val="1A1F2B"/></a:solidFill><a:latin typeface="Calibri" pitchFamily="34" charset="0"/><a:ea typeface="Calibri" pitchFamily="34" charset="-122"/><a:cs typeface="Calibri" pitchFamily="34" charset="-120"/></a:rPr><a:t>Field Testing</a:t></a:r><a:endParaRPr lang="en-US" sz="1000" dirty="0"/></a:p></p:txBody></p:sp><p:sp><p:nvSpPr><p:cNvPr id="36" name="Text 34"></p:cNvPr><p:cNvSpPr txBox="1"/><p:nvPr></p:nvPr></p:nvSpPr><p:spPr><a:xfrm><a:off x="6720840" y="4626864"/><a:ext cx="4919472" cy="365760"/></a:xfrm><a:prstGeom prst="rect"><a:avLst></a:avLst></a:prstGeom><a:noFill/><a:ln></a:ln></p:spPr><p:txBody><a:bodyPr wrap="square" lIns="0" tIns="0" rIns="0" bIns="0" rtlCol="0" anchor="ctr"></a:bodyPr><a:lstStyle/><a:p><a:pPr indent="0" marL="0"><a:buNone/></a:pPr><a:r><a:rPr lang="en-US" sz="1000" dirty="0"><a:solidFill><a:srgbClr val="1A1F2B"/></a:solidFill><a:latin typeface="Calibri" pitchFamily="34" charset="0"/><a:ea typeface="Calibri" pitchFamily="34" charset="-122"/><a:cs typeface="Calibri" pitchFamily="34" charset="-120"/></a:rPr><a:t>Menunggu pengadaan PC fisik (bukan lagi soal jaringan)</a:t></a:r><a:endParaRPr lang="en-US" sz="1000" dirty="0"/></a:p></p:txBody></p:sp><p:sp><p:nvSpPr><p:cNvPr id="37" name="Shape 35"></p:cNvPr><p:cNvSpPr/><p:nvPr></p:nvPr></p:nvSpPr><p:spPr><a:xfrm><a:off x="548640" y="5020056"/><a:ext cx="11091672" cy="365760"/></a:xfrm><a:prstGeom prst="rect"><a:avLst></a:avLst></a:prstGeom><a:solidFill><a:srgbClr val="F4F7FB"/></a:solidFill><a:ln></a:ln></p:spPr></p:sp><p:sp><p:nvSpPr><p:cNvPr id="38" name="Text 36"></p:cNvPr><p:cNvSpPr txBox="1"/><p:nvPr></p:nvPr></p:nvSpPr><p:spPr><a:xfrm><a:off x="685800" y="5020056"/><a:ext cx="3154680" cy="365760"/></a:xfrm><a:prstGeom prst="rect"><a:avLst></a:avLst></a:prstGeom><a:noFill/><a:ln></a:ln></p:spPr><p:txBody><a:bodyPr wrap="square" lIns="0" tIns="0" rIns="0" bIns="0" rtlCol="0" anchor="ctr"></a:bodyPr><a:lstStyle/><a:p><a:pPr indent="0" marL="0"><a:buNone/></a:pPr><a:r><a:rPr lang="en-US" sz="1000" dirty="0"><a:solidFill><a:srgbClr val="002B5F"/></a:solidFill><a:latin typeface="Calibri" pitchFamily="34" charset="0"/><a:ea typeface="Calibri" pitchFamily="34" charset="-122"/><a:cs typeface="Calibri" pitchFamily="34" charset="-120"/></a:rPr><a:t>gate:solar-cert / bracket-tools</a:t></a:r><a:endParaRPr lang="en-US" sz="1000" dirty="0"/></a:p></p:txBody></p:sp><p:sp><p:nvSpPr><p:cNvPr id="39" name="Text 37"></p:cNvPr><p:cNvSpPr txBox="1"/><p:nvPr></p:nvPr></p:nvSpPr><p:spPr><a:xfrm><a:off x="3977640" y="5020056"/><a:ext cx="2606040" cy="365760"/></a:xfrm><a:prstGeom prst="rect"><a:avLst></a:avLst></a:prstGeom><a:noFill/><a:ln></a:ln></p:spPr><p:txBody><a:bodyPr wrap="square" lIns="0" tIns="0" rIns="0" bIns="0" rtlCol="0" anchor="ctr"></a:bodyPr><a:lstStyle/><a:p><a:pPr indent="0" marL="0"><a:buNone/></a:pPr><a:r><a:rPr lang="en-US" sz="1000" dirty="0"><a:solidFill><a:srgbClr val="1A1F2B"/></a:solidFill><a:latin typeface="Calibri" pitchFamily="34" charset="0"/><a:ea typeface="Calibri" pitchFamily="34" charset="-122"/><a:cs typeface="Calibri" pitchFamily="34" charset="-120"/></a:rPr><a:t>Sertifikasi</a:t></a:r><a:endParaRPr lang="en-US" sz="1000" dirty="0"/></a:p></p:txBody></p:sp><p:sp><p:nvSpPr><p:cNvPr id="40" name="Text 38"></p:cNvPr><p:cNvSpPr txBox="1"/><p:nvPr></p:nvPr></p:nvSpPr><p:spPr><a:xfrm><a:off x="6720840" y="5020056"/><a:ext cx="4919472" cy="365760"/></a:xfrm><a:prstGeom prst="rect"><a:avLst></a:avLst></a:prstGeom><a:noFill/><a:ln></a:ln></p:spPr><p:txBody><a:bodyPr wrap="square" lIns="0" tIns="0" rIns="0" bIns="0" rtlCol="0" anchor="ctr"></a:bodyPr><a:lstStyle/><a:p><a:pPr indent="0" marL="0"><a:buNone/></a:pPr><a:r><a:rPr lang="en-US" sz="1000" dirty="0"><a:solidFill><a:srgbClr val="1A1F2B"/></a:solidFill><a:latin typeface="Calibri" pitchFamily="34" charset="0"/><a:ea typeface="Calibri" pitchFamily="34" charset="-122"/><a:cs typeface="Calibri" pitchFamily="34" charset="-120"/></a:rPr><a:t>Belum disourcing / ditentukan</a:t></a:r><a:endParaRPr lang="en-US" sz="1000" dirty="0"/></a:p></p:txBody></p:sp><p:sp><p:nvSpPr><p:cNvPr id="41" name="Shape 39"></p:cNvPr><p:cNvSpPr/><p:nvPr></p:nvPr></p:nvSpPr><p:spPr><a:xfrm><a:off x="548640" y="5550408"/><a:ext cx="11091672" cy="1051560"/></a:xfrm><a:prstGeom prst="roundRect"><a:avLst><a:gd name="adj" fmla="val 6087"/></a:avLst></a:prstGeom><a:solidFill><a:srgbClr val="EAF1FB"/></a:solidFill><a:ln></a:ln></p:spPr></p:sp><p:sp><p:nvSpPr><p:cNvPr id="42" name="Text 40"></p:cNvPr><p:cNvSpPr txBox="1"/><p:nvPr></p:nvPr></p:nvSpPr><p:spPr><a:xfrm><a:off x="822960" y="5669280"/><a:ext cx="10543032" cy="274320"/></a:xfrm><a:prstGeom prst="rect"><a:avLst></a:avLst></a:prstGeom><a:noFill/><a:ln></a:ln></p:spPr><p:txBody><a:bodyPr wrap="square" rtlCol="0" anchor="ctr"></a:bodyPr><a:lstStyle/><a:p><a:pPr indent="0" marL="0"><a:buNone/></a:pPr><a:r><a:rPr lang="en-US" sz="1200" b="1" dirty="0"><a:solidFill><a:srgbClr val="002B5F"/></a:solidFill><a:latin typeface="Calibri" pitchFamily="34" charset="0"/><a:ea typeface="Calibri" pitchFamily="34" charset="-122"/><a:cs typeface="Calibri" pitchFamily="34" charset="-120"/></a:rPr><a:t>Kolaborasi Field Test — RU VII Kasim/Sorong</a:t></a:r><a:endParaRPr lang="en-US" sz="1200" dirty="0"/></a:p></p:txBody></p:sp><p:sp><p:nvSpPr><p:cNvPr id="43" name="Text 41"></p:cNvPr><p:cNvSpPr txBox="1"/><p:nvPr></p:nvPr></p:nvSpPr><p:spPr><a:xfrm><a:off x="822960" y="5961888"/><a:ext cx="10543032" cy="548640"/></a:xfrm><a:prstGeom prst="rect"><a:avLst></a:avLst></a:prstGeom><a:noFill/><a:ln></a:ln></p:spPr><p:txBody><a:bodyPr wrap="square" rtlCol="0" anchor="ctr"></a:bodyPr><a:lstStyle/><a:p><a:pPr indent="0" marL="0"><a:buNone/></a:pPr><a:r><a:rPr lang="en-US" sz="1050" dirty="0"><a:solidFill><a:srgbClr val="5B6B82"/></a:solidFill><a:latin typeface="Calibri" pitchFamily="34" charset="0"/><a:ea typeface="Calibri" pitchFamily="34" charset="-122"/><a:cs typeface="Calibri" pitchFamily="34" charset="-120"/></a:rPr><a:t>Kolaborasi field test berjalan paralel di RU VII Kasim/Sorong, dengan target implementasi Desember 2026 — sejalan dengan target implementasi program 9 bulan secara keseluruhan.</a:t></a:r><a:endParaRPr lang="en-US" sz="1050" dirty="0"/></a:p></p:txBody></p:sp><p:sp><p:nvSpPr><p:cNvPr id="44" name="Text 42"></p:cNvPr><p:cNvSpPr/><p:nvPr></p:nvPr></p:nvSpPr><p:spPr><a:xfrm><a:off x="548640" y="6510528"/><a:ext cx="8229600" cy="274320"/></a:xfrm><a:prstGeom prst="rect"><a:avLst></a:avLst></a:prstGeom><a:noFill/><a:ln></a:ln></p:spPr><p:txBody><a:bodyPr wrap="square" rtlCol="0" anchor="ctr"></a:bodyPr><a:lstStyle/><a:p><a:pPr indent="0" marL="0"><a:buNone/></a:pPr><a:r><a:rPr lang="en-US" sz="900" dirty="0"><a:solidFill><a:srgbClr val="5B6B82"/></a:solidFill><a:latin typeface="Calibri" pitchFamily="34" charset="0"/><a:ea typeface="Calibri" pitchFamily="34" charset="-122"/><a:cs typeface="Calibri" pitchFamily="34" charset="-120"/></a:rPr><a:t>Gas Leak Detection System — LAPI Ganesha Utama x Lab IoT/Fisika ITB</a:t></a:r><a:endParaRPr lang="en-US" sz="900" dirty="0"/></a:p></p:txBody></p:sp><p:sp><p:nvSpPr><p:cNvPr id="45" name="Text 43"></p:cNvPr><p:cNvSpPr/><p:nvPr></p:nvPr></p:nvSpPr><p:spPr><a:xfrm><a:off x="11091672" y="6510528"/><a:ext cx="548640" cy="274320"/></a:xfrm><a:prstGeom prst="rect"><a:avLst></a:avLst></a:prstGeom><a:noFill/><a:ln></a:ln></p:spPr><p:txBody><a:bodyPr wrap="square" rtlCol="0" anchor="ctr"></a:bodyPr><a:lstStyle/><a:p><a:pPr algn="r" indent="0" marL="0"><a:buNone/></a:pPr><a:r><a:rPr lang="en-US" sz="900" dirty="0"><a:solidFill><a:srgbClr val="5B6B82"/></a:solidFill><a:latin typeface="Calibri" pitchFamily="34" charset="0"/><a:ea typeface="Calibri" pitchFamily="34" charset="-122"/><a:cs typeface="Calibri" pitchFamily="34" charset="-120"/></a:rPr><a:t>7</a:t></a:r><a:endParaRPr lang="en-US" sz="900" dirty="0"/></a:p></p:txBody></p:sp></p:spTree></p:cSld><p:clrMapOvr><a:masterClrMapping/></p:clrMapOvr></p:sld>
+<file path=ppt/slides/slide7.xml><?xml version="1.0" encoding="utf-8"?>
+<p:sld xmlns:a="http://schemas.openxmlformats.org/drawingml/2006/main" xmlns:r="http://schemas.openxmlformats.org/officeDocument/2006/relationships" xmlns:p="http://schemas.openxmlformats.org/presentationml/2006/main">
+  <p:cSld name="Slide 7">
+    <p:bg>
+      <p:bgPr>
+        <a:solidFill>
+          <a:srgbClr val="FFFFFF"/>
+        </a:solidFill>
+      </p:bgPr>
+    </p:bg>
+    <p:spTree>
+      <p:nvGrpSpPr>
+        <p:cNvPr id="1" name=""/>
+        <p:cNvGrpSpPr/>
+        <p:nvPr/>
+      </p:nvGrpSpPr>
+      <p:grpSpPr>
+        <a:xfrm>
+          <a:off x="0" y="0"/>
+          <a:ext cx="0" cy="0"/>
+          <a:chOff x="0" y="0"/>
+          <a:chExt cx="0" cy="0"/>
+        </a:xfrm>
+      </p:grpSpPr>
+      <p:sp>
+        <p:nvSpPr>
+          <p:cNvPr id="2" name="Text 0"/>
+          <p:cNvSpPr/>
+          <p:nvPr/>
+        </p:nvSpPr>
+        <p:spPr>
+          <a:xfrm>
+            <a:off x="548640" y="457200"/>
+            <a:ext cx="7315200" cy="320040"/>
+          </a:xfrm>
+          <a:prstGeom prst="rect">
+            <a:avLst/>
+          </a:prstGeom>
+          <a:noFill/>
+          <a:ln/>
+        </p:spPr>
+        <p:txBody>
+          <a:bodyPr wrap="square" rtlCol="0" anchor="ctr"/>
+          <a:lstStyle/>
+          <a:p>
+            <a:pPr indent="0" marL="0">
+              <a:buNone/>
+            </a:pPr>
+            <a:r>
+              <a:rPr lang="en-US" sz="1200" b="1" spc="200" kern="0" dirty="0">
+                <a:solidFill>
+                  <a:srgbClr val="38C0EF"/>
+                </a:solidFill>
+                <a:latin typeface="Calibri" pitchFamily="34" charset="0"/>
+                <a:ea typeface="Calibri" pitchFamily="34" charset="-122"/>
+                <a:cs typeface="Calibri" pitchFamily="34" charset="-120"/>
+              </a:rPr>
+              <a:t>OUTSTANDING &amp; KOLABORASI LAIN</a:t>
+            </a:r>
+            <a:endParaRPr lang="en-US" sz="1200" dirty="0"/>
+          </a:p>
+        </p:txBody>
+      </p:sp>
+      <p:sp>
+        <p:nvSpPr>
+          <p:cNvPr id="3" name="Text 1"/>
+          <p:cNvSpPr txBox="1"/>
+          <p:nvPr/>
+        </p:nvSpPr>
+        <p:spPr>
+          <a:xfrm>
+            <a:off x="548640" y="749808"/>
+            <a:ext cx="11091672" cy="640080"/>
+          </a:xfrm>
+          <a:prstGeom prst="rect">
+            <a:avLst/>
+          </a:prstGeom>
+          <a:noFill/>
+          <a:ln/>
+        </p:spPr>
+        <p:txBody>
+          <a:bodyPr wrap="square" rtlCol="0" anchor="ctr"/>
+          <a:lstStyle/>
+          <a:p>
+            <a:pPr indent="0" marL="0">
+              <a:buNone/>
+            </a:pPr>
+            <a:r>
+              <a:rPr lang="en-US" sz="3000" b="1" dirty="0">
+                <a:solidFill>
+                  <a:srgbClr val="002B5F"/>
+                </a:solidFill>
+                <a:latin typeface="Cambria" pitchFamily="34" charset="0"/>
+                <a:ea typeface="Cambria" pitchFamily="34" charset="-122"/>
+                <a:cs typeface="Cambria" pitchFamily="34" charset="-120"/>
+              </a:rPr>
+              <a:t>Ringkasan Outstanding Item</a:t>
+            </a:r>
+            <a:endParaRPr lang="en-US" sz="3000" dirty="0"/>
+          </a:p>
+        </p:txBody>
+      </p:sp>
+      <p:sp>
+        <p:nvSpPr>
+          <p:cNvPr id="4" name="Text 2"/>
+          <p:cNvSpPr txBox="1"/>
+          <p:nvPr/>
+        </p:nvSpPr>
+        <p:spPr>
+          <a:xfrm>
+            <a:off x="548640" y="1298448"/>
+            <a:ext cx="11091672" cy="365760"/>
+          </a:xfrm>
+          <a:prstGeom prst="rect">
+            <a:avLst/>
+          </a:prstGeom>
+          <a:noFill/>
+          <a:ln/>
+        </p:spPr>
+        <p:txBody>
+          <a:bodyPr wrap="square" rtlCol="0" anchor="ctr"/>
+          <a:lstStyle/>
+          <a:p>
+            <a:pPr indent="0" marL="0">
+              <a:buNone/>
+            </a:pPr>
+            <a:r>
+              <a:rPr lang="en-US" sz="1400" dirty="0">
+                <a:solidFill>
+                  <a:srgbClr val="5B6B82"/>
+                </a:solidFill>
+                <a:latin typeface="Calibri" pitchFamily="34" charset="0"/>
+                <a:ea typeface="Calibri" pitchFamily="34" charset="-122"/>
+                <a:cs typeface="Calibri" pitchFamily="34" charset="-120"/>
+              </a:rPr>
+              <a:t>Seluruh gate ditampilkan apa adanya, termasuk yang belum ada jawaban dari Pertamina</a:t>
+            </a:r>
+            <a:endParaRPr lang="en-US" sz="1400" dirty="0"/>
+          </a:p>
+        </p:txBody>
+      </p:sp>
+      <p:sp>
+        <p:nvSpPr>
+          <p:cNvPr id="5" name="Shape 3"/>
+          <p:cNvSpPr/>
+          <p:nvPr/>
+        </p:nvSpPr>
+        <p:spPr>
+          <a:xfrm>
+            <a:off x="548640" y="1874520"/>
+            <a:ext cx="11091672" cy="365760"/>
+          </a:xfrm>
+          <a:prstGeom prst="rect">
+            <a:avLst/>
+          </a:prstGeom>
+          <a:solidFill>
+            <a:srgbClr val="002B5F"/>
+          </a:solidFill>
+          <a:ln/>
+        </p:spPr>
+      </p:sp>
+      <p:sp>
+        <p:nvSpPr>
+          <p:cNvPr id="6" name="Text 4"/>
+          <p:cNvSpPr txBox="1"/>
+          <p:nvPr/>
+        </p:nvSpPr>
+        <p:spPr>
+          <a:xfrm>
+            <a:off x="685800" y="1874520"/>
+            <a:ext cx="3154680" cy="365760"/>
+          </a:xfrm>
+          <a:prstGeom prst="rect">
+            <a:avLst/>
+          </a:prstGeom>
+          <a:noFill/>
+          <a:ln/>
+        </p:spPr>
+        <p:txBody>
+          <a:bodyPr wrap="square" lIns="0" tIns="0" rIns="0" bIns="0" rtlCol="0" anchor="ctr"/>
+          <a:lstStyle/>
+          <a:p>
+            <a:pPr indent="0" marL="0">
+              <a:buNone/>
+            </a:pPr>
+            <a:r>
+              <a:rPr lang="en-US" sz="1050" b="1" dirty="0">
+                <a:solidFill>
+                  <a:srgbClr val="FFFFFF"/>
+                </a:solidFill>
+                <a:latin typeface="Calibri" pitchFamily="34" charset="0"/>
+                <a:ea typeface="Calibri" pitchFamily="34" charset="-122"/>
+                <a:cs typeface="Calibri" pitchFamily="34" charset="-120"/>
+              </a:rPr>
+              <a:t>Gate</a:t>
+            </a:r>
+            <a:endParaRPr lang="en-US" sz="1050" dirty="0"/>
+          </a:p>
+        </p:txBody>
+      </p:sp>
+      <p:sp>
+        <p:nvSpPr>
+          <p:cNvPr id="7" name="Text 5"/>
+          <p:cNvSpPr txBox="1"/>
+          <p:nvPr/>
+        </p:nvSpPr>
+        <p:spPr>
+          <a:xfrm>
+            <a:off x="3977640" y="1874520"/>
+            <a:ext cx="2606040" cy="365760"/>
+          </a:xfrm>
+          <a:prstGeom prst="rect">
+            <a:avLst/>
+          </a:prstGeom>
+          <a:noFill/>
+          <a:ln/>
+        </p:spPr>
+        <p:txBody>
+          <a:bodyPr wrap="square" lIns="0" tIns="0" rIns="0" bIns="0" rtlCol="0" anchor="ctr"/>
+          <a:lstStyle/>
+          <a:p>
+            <a:pPr indent="0" marL="0">
+              <a:buNone/>
+            </a:pPr>
+            <a:r>
+              <a:rPr lang="en-US" sz="1050" b="1" dirty="0">
+                <a:solidFill>
+                  <a:srgbClr val="FFFFFF"/>
+                </a:solidFill>
+                <a:latin typeface="Calibri" pitchFamily="34" charset="0"/>
+                <a:ea typeface="Calibri" pitchFamily="34" charset="-122"/>
+                <a:cs typeface="Calibri" pitchFamily="34" charset="-120"/>
+              </a:rPr>
+              <a:t>Kategori</a:t>
+            </a:r>
+            <a:endParaRPr lang="en-US" sz="1050" dirty="0"/>
+          </a:p>
+        </p:txBody>
+      </p:sp>
+      <p:sp>
+        <p:nvSpPr>
+          <p:cNvPr id="8" name="Text 6"/>
+          <p:cNvSpPr txBox="1"/>
+          <p:nvPr/>
+        </p:nvSpPr>
+        <p:spPr>
+          <a:xfrm>
+            <a:off x="6720840" y="1874520"/>
+            <a:ext cx="4919472" cy="365760"/>
+          </a:xfrm>
+          <a:prstGeom prst="rect">
+            <a:avLst/>
+          </a:prstGeom>
+          <a:noFill/>
+          <a:ln/>
+        </p:spPr>
+        <p:txBody>
+          <a:bodyPr wrap="square" lIns="0" tIns="0" rIns="0" bIns="0" rtlCol="0" anchor="ctr"/>
+          <a:lstStyle/>
+          <a:p>
+            <a:pPr indent="0" marL="0">
+              <a:buNone/>
+            </a:pPr>
+            <a:r>
+              <a:rPr lang="en-US" sz="1050" b="1" dirty="0">
+                <a:solidFill>
+                  <a:srgbClr val="FFFFFF"/>
+                </a:solidFill>
+                <a:latin typeface="Calibri" pitchFamily="34" charset="0"/>
+                <a:ea typeface="Calibri" pitchFamily="34" charset="-122"/>
+                <a:cs typeface="Calibri" pitchFamily="34" charset="-120"/>
+              </a:rPr>
+              <a:t>Status</a:t>
+            </a:r>
+            <a:endParaRPr lang="en-US" sz="1050" dirty="0"/>
+          </a:p>
+        </p:txBody>
+      </p:sp>
+      <p:sp>
+        <p:nvSpPr>
+          <p:cNvPr id="9" name="Shape 7"/>
+          <p:cNvSpPr/>
+          <p:nvPr/>
+        </p:nvSpPr>
+        <p:spPr>
+          <a:xfrm>
+            <a:off x="548640" y="2267712"/>
+            <a:ext cx="11091672" cy="365760"/>
+          </a:xfrm>
+          <a:prstGeom prst="rect">
+            <a:avLst/>
+          </a:prstGeom>
+          <a:solidFill>
+            <a:srgbClr val="FFFFFF"/>
+          </a:solidFill>
+          <a:ln/>
+        </p:spPr>
+      </p:sp>
+      <p:sp>
+        <p:nvSpPr>
+          <p:cNvPr id="10" name="Text 8"/>
+          <p:cNvSpPr txBox="1"/>
+          <p:nvPr/>
+        </p:nvSpPr>
+        <p:spPr>
+          <a:xfrm>
+            <a:off x="685800" y="2267712"/>
+            <a:ext cx="3154680" cy="365760"/>
+          </a:xfrm>
+          <a:prstGeom prst="rect">
+            <a:avLst/>
+          </a:prstGeom>
+          <a:noFill/>
+          <a:ln/>
+        </p:spPr>
+        <p:txBody>
+          <a:bodyPr wrap="square" lIns="0" tIns="0" rIns="0" bIns="0" rtlCol="0" anchor="ctr"/>
+          <a:lstStyle/>
+          <a:p>
+            <a:pPr indent="0" marL="0">
+              <a:buNone/>
+            </a:pPr>
+            <a:r>
+              <a:rPr lang="en-US" sz="1000" dirty="0">
+                <a:solidFill>
+                  <a:srgbClr val="002B5F"/>
+                </a:solidFill>
+                <a:latin typeface="Calibri" pitchFamily="34" charset="0"/>
+                <a:ea typeface="Calibri" pitchFamily="34" charset="-122"/>
+                <a:cs typeface="Calibri" pitchFamily="34" charset="-120"/>
+              </a:rPr>
+              <a:t>gate:atex-scoping</a:t>
+            </a:r>
+            <a:endParaRPr lang="en-US" sz="1000" dirty="0"/>
+          </a:p>
+        </p:txBody>
+      </p:sp>
+      <p:sp>
+        <p:nvSpPr>
+          <p:cNvPr id="11" name="Text 9"/>
+          <p:cNvSpPr txBox="1"/>
+          <p:nvPr/>
+        </p:nvSpPr>
+        <p:spPr>
+          <a:xfrm>
+            <a:off x="3977640" y="2267712"/>
+            <a:ext cx="2606040" cy="365760"/>
+          </a:xfrm>
+          <a:prstGeom prst="rect">
+            <a:avLst/>
+          </a:prstGeom>
+          <a:noFill/>
+          <a:ln/>
+        </p:spPr>
+        <p:txBody>
+          <a:bodyPr wrap="square" lIns="0" tIns="0" rIns="0" bIns="0" rtlCol="0" anchor="ctr"/>
+          <a:lstStyle/>
+          <a:p>
+            <a:pPr indent="0" marL="0">
+              <a:buNone/>
+            </a:pPr>
+            <a:r>
+              <a:rPr lang="en-US" sz="1000" dirty="0">
+                <a:solidFill>
+                  <a:srgbClr val="1A1F2B"/>
+                </a:solidFill>
+                <a:latin typeface="Calibri" pitchFamily="34" charset="0"/>
+                <a:ea typeface="Calibri" pitchFamily="34" charset="-122"/>
+                <a:cs typeface="Calibri" pitchFamily="34" charset="-120"/>
+              </a:rPr>
+              <a:t>Sertifikasi</a:t>
+            </a:r>
+            <a:endParaRPr lang="en-US" sz="1000" dirty="0"/>
+          </a:p>
+        </p:txBody>
+      </p:sp>
+      <p:sp>
+        <p:nvSpPr>
+          <p:cNvPr id="12" name="Text 10"/>
+          <p:cNvSpPr txBox="1"/>
+          <p:nvPr/>
+        </p:nvSpPr>
+        <p:spPr>
+          <a:xfrm>
+            <a:off x="6720840" y="2267712"/>
+            <a:ext cx="4919472" cy="365760"/>
+          </a:xfrm>
+          <a:prstGeom prst="rect">
+            <a:avLst/>
+          </a:prstGeom>
+          <a:noFill/>
+          <a:ln/>
+        </p:spPr>
+        <p:txBody>
+          <a:bodyPr wrap="square" lIns="0" tIns="0" rIns="0" bIns="0" rtlCol="0" anchor="ctr"/>
+          <a:lstStyle/>
+          <a:p>
+            <a:pPr indent="0" marL="0">
+              <a:buNone/>
+            </a:pPr>
+            <a:r>
+              <a:rPr lang="en-US" sz="1000" dirty="0">
+                <a:solidFill>
+                  <a:srgbClr val="1A1F2B"/>
+                </a:solidFill>
+                <a:latin typeface="Calibri" pitchFamily="34" charset="0"/>
+                <a:ea typeface="Calibri" pitchFamily="34" charset="-122"/>
+                <a:cs typeface="Calibri" pitchFamily="34" charset="-120"/>
+              </a:rPr>
+              <a:t>Zona/kelas suhu ditargetkan; grup gas &amp; proteksi terbuka</a:t>
+            </a:r>
+            <a:endParaRPr lang="en-US" sz="1000" dirty="0"/>
+          </a:p>
+        </p:txBody>
+      </p:sp>
+      <p:sp>
+        <p:nvSpPr>
+          <p:cNvPr id="13" name="Shape 11"/>
+          <p:cNvSpPr/>
+          <p:nvPr/>
+        </p:nvSpPr>
+        <p:spPr>
+          <a:xfrm>
+            <a:off x="548640" y="2660904"/>
+            <a:ext cx="11091672" cy="365760"/>
+          </a:xfrm>
+          <a:prstGeom prst="rect">
+            <a:avLst/>
+          </a:prstGeom>
+          <a:solidFill>
+            <a:srgbClr val="F4F7FB"/>
+          </a:solidFill>
+          <a:ln/>
+        </p:spPr>
+      </p:sp>
+      <p:sp>
+        <p:nvSpPr>
+          <p:cNvPr id="14" name="Text 12"/>
+          <p:cNvSpPr txBox="1"/>
+          <p:nvPr/>
+        </p:nvSpPr>
+        <p:spPr>
+          <a:xfrm>
+            <a:off x="685800" y="2660904"/>
+            <a:ext cx="3154680" cy="365760"/>
+          </a:xfrm>
+          <a:prstGeom prst="rect">
+            <a:avLst/>
+          </a:prstGeom>
+          <a:noFill/>
+          <a:ln/>
+        </p:spPr>
+        <p:txBody>
+          <a:bodyPr wrap="square" lIns="0" tIns="0" rIns="0" bIns="0" rtlCol="0" anchor="ctr"/>
+          <a:lstStyle/>
+          <a:p>
+            <a:pPr indent="0" marL="0">
+              <a:buNone/>
+            </a:pPr>
+            <a:r>
+              <a:rPr lang="en-US" sz="1000" dirty="0">
+                <a:solidFill>
+                  <a:srgbClr val="002B5F"/>
+                </a:solidFill>
+                <a:latin typeface="Calibri" pitchFamily="34" charset="0"/>
+                <a:ea typeface="Calibri" pitchFamily="34" charset="-122"/>
+                <a:cs typeface="Calibri" pitchFamily="34" charset="-120"/>
+              </a:rPr>
+              <a:t>gate:gas-extra</a:t>
+            </a:r>
+            <a:endParaRPr lang="en-US" sz="1000" dirty="0"/>
+          </a:p>
+        </p:txBody>
+      </p:sp>
+      <p:sp>
+        <p:nvSpPr>
+          <p:cNvPr id="15" name="Text 13"/>
+          <p:cNvSpPr txBox="1"/>
+          <p:nvPr/>
+        </p:nvSpPr>
+        <p:spPr>
+          <a:xfrm>
+            <a:off x="3977640" y="2660904"/>
+            <a:ext cx="2606040" cy="365760"/>
+          </a:xfrm>
+          <a:prstGeom prst="rect">
+            <a:avLst/>
+          </a:prstGeom>
+          <a:noFill/>
+          <a:ln/>
+        </p:spPr>
+        <p:txBody>
+          <a:bodyPr wrap="square" lIns="0" tIns="0" rIns="0" bIns="0" rtlCol="0" anchor="ctr"/>
+          <a:lstStyle/>
+          <a:p>
+            <a:pPr indent="0" marL="0">
+              <a:buNone/>
+            </a:pPr>
+            <a:r>
+              <a:rPr lang="en-US" sz="1000" dirty="0">
+                <a:solidFill>
+                  <a:srgbClr val="1A1F2B"/>
+                </a:solidFill>
+                <a:latin typeface="Calibri" pitchFamily="34" charset="0"/>
+                <a:ea typeface="Calibri" pitchFamily="34" charset="-122"/>
+                <a:cs typeface="Calibri" pitchFamily="34" charset="-120"/>
+              </a:rPr>
+              <a:t>Kapabilitas Gas</a:t>
+            </a:r>
+            <a:endParaRPr lang="en-US" sz="1000" dirty="0"/>
+          </a:p>
+        </p:txBody>
+      </p:sp>
+      <p:sp>
+        <p:nvSpPr>
+          <p:cNvPr id="16" name="Text 14"/>
+          <p:cNvSpPr txBox="1"/>
+          <p:nvPr/>
+        </p:nvSpPr>
+        <p:spPr>
+          <a:xfrm>
+            <a:off x="6720840" y="2660904"/>
+            <a:ext cx="4919472" cy="365760"/>
+          </a:xfrm>
+          <a:prstGeom prst="rect">
+            <a:avLst/>
+          </a:prstGeom>
+          <a:noFill/>
+          <a:ln/>
+        </p:spPr>
+        <p:txBody>
+          <a:bodyPr wrap="square" lIns="0" tIns="0" rIns="0" bIns="0" rtlCol="0" anchor="ctr"/>
+          <a:lstStyle/>
+          <a:p>
+            <a:pPr indent="0" marL="0">
+              <a:buNone/>
+            </a:pPr>
+            <a:r>
+              <a:rPr lang="en-US" sz="1000" dirty="0">
+                <a:solidFill>
+                  <a:srgbClr val="1A1F2B"/>
+                </a:solidFill>
+                <a:latin typeface="Calibri" pitchFamily="34" charset="0"/>
+                <a:ea typeface="Calibri" pitchFamily="34" charset="-122"/>
+                <a:cs typeface="Calibri" pitchFamily="34" charset="-120"/>
+              </a:rPr>
+              <a:t>Menunggu sampel Benzena/CO/H2S</a:t>
+            </a:r>
+            <a:endParaRPr lang="en-US" sz="1000" dirty="0"/>
+          </a:p>
+        </p:txBody>
+      </p:sp>
+      <p:sp>
+        <p:nvSpPr>
+          <p:cNvPr id="17" name="Shape 15"/>
+          <p:cNvSpPr/>
+          <p:nvPr/>
+        </p:nvSpPr>
+        <p:spPr>
+          <a:xfrm>
+            <a:off x="548640" y="3054096"/>
+            <a:ext cx="11091672" cy="365760"/>
+          </a:xfrm>
+          <a:prstGeom prst="rect">
+            <a:avLst/>
+          </a:prstGeom>
+          <a:solidFill>
+            <a:srgbClr val="FFFFFF"/>
+          </a:solidFill>
+          <a:ln/>
+        </p:spPr>
+      </p:sp>
+      <p:sp>
+        <p:nvSpPr>
+          <p:cNvPr id="18" name="Text 16"/>
+          <p:cNvSpPr txBox="1"/>
+          <p:nvPr/>
+        </p:nvSpPr>
+        <p:spPr>
+          <a:xfrm>
+            <a:off x="685800" y="3054096"/>
+            <a:ext cx="3154680" cy="365760"/>
+          </a:xfrm>
+          <a:prstGeom prst="rect">
+            <a:avLst/>
+          </a:prstGeom>
+          <a:noFill/>
+          <a:ln/>
+        </p:spPr>
+        <p:txBody>
+          <a:bodyPr wrap="square" lIns="0" tIns="0" rIns="0" bIns="0" rtlCol="0" anchor="ctr"/>
+          <a:lstStyle/>
+          <a:p>
+            <a:pPr indent="0" marL="0">
+              <a:buNone/>
+            </a:pPr>
+            <a:r>
+              <a:rPr lang="en-US" sz="1000" dirty="0">
+                <a:solidFill>
+                  <a:srgbClr val="002B5F"/>
+                </a:solidFill>
+                <a:latin typeface="Calibri" pitchFamily="34" charset="0"/>
+                <a:ea typeface="Calibri" pitchFamily="34" charset="-122"/>
+                <a:cs typeface="Calibri" pitchFamily="34" charset="-120"/>
+              </a:rPr>
+              <a:t>gate:cert-height</a:t>
+            </a:r>
+            <a:endParaRPr lang="en-US" sz="1000" dirty="0"/>
+          </a:p>
+        </p:txBody>
+      </p:sp>
+      <p:sp>
+        <p:nvSpPr>
+          <p:cNvPr id="19" name="Text 17"/>
+          <p:cNvSpPr txBox="1"/>
+          <p:nvPr/>
+        </p:nvSpPr>
+        <p:spPr>
+          <a:xfrm>
+            <a:off x="3977640" y="3054096"/>
+            <a:ext cx="2606040" cy="365760"/>
+          </a:xfrm>
+          <a:prstGeom prst="rect">
+            <a:avLst/>
+          </a:prstGeom>
+          <a:noFill/>
+          <a:ln/>
+        </p:spPr>
+        <p:txBody>
+          <a:bodyPr wrap="square" lIns="0" tIns="0" rIns="0" bIns="0" rtlCol="0" anchor="ctr"/>
+          <a:lstStyle/>
+          <a:p>
+            <a:pPr indent="0" marL="0">
+              <a:buNone/>
+            </a:pPr>
+            <a:r>
+              <a:rPr lang="en-US" sz="1000" dirty="0">
+                <a:solidFill>
+                  <a:srgbClr val="1A1F2B"/>
+                </a:solidFill>
+                <a:latin typeface="Calibri" pitchFamily="34" charset="0"/>
+                <a:ea typeface="Calibri" pitchFamily="34" charset="-122"/>
+                <a:cs typeface="Calibri" pitchFamily="34" charset="-120"/>
+              </a:rPr>
+              <a:t>Sertifikasi</a:t>
+            </a:r>
+            <a:endParaRPr lang="en-US" sz="1000" dirty="0"/>
+          </a:p>
+        </p:txBody>
+      </p:sp>
+      <p:sp>
+        <p:nvSpPr>
+          <p:cNvPr id="20" name="Text 18"/>
+          <p:cNvSpPr txBox="1"/>
+          <p:nvPr/>
+        </p:nvSpPr>
+        <p:spPr>
+          <a:xfrm>
+            <a:off x="6720840" y="3054096"/>
+            <a:ext cx="4919472" cy="365760"/>
+          </a:xfrm>
+          <a:prstGeom prst="rect">
+            <a:avLst/>
+          </a:prstGeom>
+          <a:noFill/>
+          <a:ln/>
+        </p:spPr>
+        <p:txBody>
+          <a:bodyPr wrap="square" lIns="0" tIns="0" rIns="0" bIns="0" rtlCol="0" anchor="ctr"/>
+          <a:lstStyle/>
+          <a:p>
+            <a:pPr indent="0" marL="0">
+              <a:buNone/>
+            </a:pPr>
+            <a:r>
+              <a:rPr lang="en-US" sz="1000" dirty="0">
+                <a:solidFill>
+                  <a:srgbClr val="1A1F2B"/>
+                </a:solidFill>
+                <a:latin typeface="Calibri" pitchFamily="34" charset="0"/>
+                <a:ea typeface="Calibri" pitchFamily="34" charset="-122"/>
+                <a:cs typeface="Calibri" pitchFamily="34" charset="-120"/>
+              </a:rPr>
+              <a:t>Instalasi tinggi belum tersertifikasi</a:t>
+            </a:r>
+            <a:endParaRPr lang="en-US" sz="1000" dirty="0"/>
+          </a:p>
+        </p:txBody>
+      </p:sp>
+      <p:sp>
+        <p:nvSpPr>
+          <p:cNvPr id="21" name="Shape 19"/>
+          <p:cNvSpPr/>
+          <p:nvPr/>
+        </p:nvSpPr>
+        <p:spPr>
+          <a:xfrm>
+            <a:off x="548640" y="3447288"/>
+            <a:ext cx="11091672" cy="365760"/>
+          </a:xfrm>
+          <a:prstGeom prst="rect">
+            <a:avLst/>
+          </a:prstGeom>
+          <a:solidFill>
+            <a:srgbClr val="F4F7FB"/>
+          </a:solidFill>
+          <a:ln/>
+        </p:spPr>
+      </p:sp>
+      <p:sp>
+        <p:nvSpPr>
+          <p:cNvPr id="22" name="Text 20"/>
+          <p:cNvSpPr txBox="1"/>
+          <p:nvPr/>
+        </p:nvSpPr>
+        <p:spPr>
+          <a:xfrm>
+            <a:off x="685800" y="3447288"/>
+            <a:ext cx="3154680" cy="365760"/>
+          </a:xfrm>
+          <a:prstGeom prst="rect">
+            <a:avLst/>
+          </a:prstGeom>
+          <a:noFill/>
+          <a:ln/>
+        </p:spPr>
+        <p:txBody>
+          <a:bodyPr wrap="square" lIns="0" tIns="0" rIns="0" bIns="0" rtlCol="0" anchor="ctr"/>
+          <a:lstStyle/>
+          <a:p>
+            <a:pPr indent="0" marL="0">
+              <a:buNone/>
+            </a:pPr>
+            <a:r>
+              <a:rPr lang="en-US" sz="1000" dirty="0">
+                <a:solidFill>
+                  <a:srgbClr val="002B5F"/>
+                </a:solidFill>
+                <a:latin typeface="Calibri" pitchFamily="34" charset="0"/>
+                <a:ea typeface="Calibri" pitchFamily="34" charset="-122"/>
+                <a:cs typeface="Calibri" pitchFamily="34" charset="-120"/>
+              </a:rPr>
+              <a:t>gate:ch-batt-safety</a:t>
+            </a:r>
+            <a:endParaRPr lang="en-US" sz="1000" dirty="0"/>
+          </a:p>
+        </p:txBody>
+      </p:sp>
+      <p:sp>
+        <p:nvSpPr>
+          <p:cNvPr id="23" name="Text 21"/>
+          <p:cNvSpPr txBox="1"/>
+          <p:nvPr/>
+        </p:nvSpPr>
+        <p:spPr>
+          <a:xfrm>
+            <a:off x="3977640" y="3447288"/>
+            <a:ext cx="2606040" cy="365760"/>
+          </a:xfrm>
+          <a:prstGeom prst="rect">
+            <a:avLst/>
+          </a:prstGeom>
+          <a:noFill/>
+          <a:ln/>
+        </p:spPr>
+        <p:txBody>
+          <a:bodyPr wrap="square" lIns="0" tIns="0" rIns="0" bIns="0" rtlCol="0" anchor="ctr"/>
+          <a:lstStyle/>
+          <a:p>
+            <a:pPr indent="0" marL="0">
+              <a:buNone/>
+            </a:pPr>
+            <a:r>
+              <a:rPr lang="en-US" sz="1000" dirty="0">
+                <a:solidFill>
+                  <a:srgbClr val="1A1F2B"/>
+                </a:solidFill>
+                <a:latin typeface="Calibri" pitchFamily="34" charset="0"/>
+                <a:ea typeface="Calibri" pitchFamily="34" charset="-122"/>
+                <a:cs typeface="Calibri" pitchFamily="34" charset="-120"/>
+              </a:rPr>
+              <a:t>Sertifikasi</a:t>
+            </a:r>
+            <a:endParaRPr lang="en-US" sz="1000" dirty="0"/>
+          </a:p>
+        </p:txBody>
+      </p:sp>
+      <p:sp>
+        <p:nvSpPr>
+          <p:cNvPr id="24" name="Text 22"/>
+          <p:cNvSpPr txBox="1"/>
+          <p:nvPr/>
+        </p:nvSpPr>
+        <p:spPr>
+          <a:xfrm>
+            <a:off x="6720840" y="3447288"/>
+            <a:ext cx="4919472" cy="365760"/>
+          </a:xfrm>
+          <a:prstGeom prst="rect">
+            <a:avLst/>
+          </a:prstGeom>
+          <a:noFill/>
+          <a:ln/>
+        </p:spPr>
+        <p:txBody>
+          <a:bodyPr wrap="square" lIns="0" tIns="0" rIns="0" bIns="0" rtlCol="0" anchor="ctr"/>
+          <a:lstStyle/>
+          <a:p>
+            <a:pPr indent="0" marL="0">
+              <a:buNone/>
+            </a:pPr>
+            <a:r>
+              <a:rPr lang="en-US" sz="1000" dirty="0">
+                <a:solidFill>
+                  <a:srgbClr val="1A1F2B"/>
+                </a:solidFill>
+                <a:latin typeface="Calibri" pitchFamily="34" charset="0"/>
+                <a:ea typeface="Calibri" pitchFamily="34" charset="-122"/>
+                <a:cs typeface="Calibri" pitchFamily="34" charset="-120"/>
+              </a:rPr>
+              <a:t>Baterai CH &amp; Node Sensor belum Ex-verified</a:t>
+            </a:r>
+            <a:endParaRPr lang="en-US" sz="1000" dirty="0"/>
+          </a:p>
+        </p:txBody>
+      </p:sp>
+      <p:sp>
+        <p:nvSpPr>
+          <p:cNvPr id="25" name="Shape 23"/>
+          <p:cNvSpPr/>
+          <p:nvPr/>
+        </p:nvSpPr>
+        <p:spPr>
+          <a:xfrm>
+            <a:off x="548640" y="3840480"/>
+            <a:ext cx="11091672" cy="365760"/>
+          </a:xfrm>
+          <a:prstGeom prst="rect">
+            <a:avLst/>
+          </a:prstGeom>
+          <a:solidFill>
+            <a:srgbClr val="FFFFFF"/>
+          </a:solidFill>
+          <a:ln/>
+        </p:spPr>
+      </p:sp>
+      <p:sp>
+        <p:nvSpPr>
+          <p:cNvPr id="26" name="Text 24"/>
+          <p:cNvSpPr txBox="1"/>
+          <p:nvPr/>
+        </p:nvSpPr>
+        <p:spPr>
+          <a:xfrm>
+            <a:off x="685800" y="3840480"/>
+            <a:ext cx="3154680" cy="365760"/>
+          </a:xfrm>
+          <a:prstGeom prst="rect">
+            <a:avLst/>
+          </a:prstGeom>
+          <a:noFill/>
+          <a:ln/>
+        </p:spPr>
+        <p:txBody>
+          <a:bodyPr wrap="square" lIns="0" tIns="0" rIns="0" bIns="0" rtlCol="0" anchor="ctr"/>
+          <a:lstStyle/>
+          <a:p>
+            <a:pPr indent="0" marL="0">
+              <a:buNone/>
+            </a:pPr>
+            <a:r>
+              <a:rPr lang="en-US" sz="1000" dirty="0">
+                <a:solidFill>
+                  <a:srgbClr val="002B5F"/>
+                </a:solidFill>
+                <a:latin typeface="Calibri" pitchFamily="34" charset="0"/>
+                <a:ea typeface="Calibri" pitchFamily="34" charset="-122"/>
+                <a:cs typeface="Calibri" pitchFamily="34" charset="-120"/>
+              </a:rPr>
+              <a:t>gate:jsa</a:t>
+            </a:r>
+            <a:endParaRPr lang="en-US" sz="1000" dirty="0"/>
+          </a:p>
+        </p:txBody>
+      </p:sp>
+      <p:sp>
+        <p:nvSpPr>
+          <p:cNvPr id="27" name="Text 25"/>
+          <p:cNvSpPr txBox="1"/>
+          <p:nvPr/>
+        </p:nvSpPr>
+        <p:spPr>
+          <a:xfrm>
+            <a:off x="3977640" y="3840480"/>
+            <a:ext cx="2606040" cy="365760"/>
+          </a:xfrm>
+          <a:prstGeom prst="rect">
+            <a:avLst/>
+          </a:prstGeom>
+          <a:noFill/>
+          <a:ln/>
+        </p:spPr>
+        <p:txBody>
+          <a:bodyPr wrap="square" lIns="0" tIns="0" rIns="0" bIns="0" rtlCol="0" anchor="ctr"/>
+          <a:lstStyle/>
+          <a:p>
+            <a:pPr indent="0" marL="0">
+              <a:buNone/>
+            </a:pPr>
+            <a:r>
+              <a:rPr lang="en-US" sz="1000" dirty="0">
+                <a:solidFill>
+                  <a:srgbClr val="1A1F2B"/>
+                </a:solidFill>
+                <a:latin typeface="Calibri" pitchFamily="34" charset="0"/>
+                <a:ea typeface="Calibri" pitchFamily="34" charset="-122"/>
+                <a:cs typeface="Calibri" pitchFamily="34" charset="-120"/>
+              </a:rPr>
+              <a:t>Field Testing</a:t>
+            </a:r>
+            <a:endParaRPr lang="en-US" sz="1000" dirty="0"/>
+          </a:p>
+        </p:txBody>
+      </p:sp>
+      <p:sp>
+        <p:nvSpPr>
+          <p:cNvPr id="28" name="Text 26"/>
+          <p:cNvSpPr txBox="1"/>
+          <p:nvPr/>
+        </p:nvSpPr>
+        <p:spPr>
+          <a:xfrm>
+            <a:off x="6720840" y="3840480"/>
+            <a:ext cx="4919472" cy="365760"/>
+          </a:xfrm>
+          <a:prstGeom prst="rect">
+            <a:avLst/>
+          </a:prstGeom>
+          <a:noFill/>
+          <a:ln/>
+        </p:spPr>
+        <p:txBody>
+          <a:bodyPr wrap="square" lIns="0" tIns="0" rIns="0" bIns="0" rtlCol="0" anchor="ctr"/>
+          <a:lstStyle/>
+          <a:p>
+            <a:pPr indent="0" marL="0">
+              <a:buNone/>
+            </a:pPr>
+            <a:r>
+              <a:rPr lang="en-US" sz="1000" dirty="0">
+                <a:solidFill>
+                  <a:srgbClr val="1A1F2B"/>
+                </a:solidFill>
+                <a:latin typeface="Calibri" pitchFamily="34" charset="0"/>
+                <a:ea typeface="Calibri" pitchFamily="34" charset="-122"/>
+                <a:cs typeface="Calibri" pitchFamily="34" charset="-120"/>
+              </a:rPr>
+              <a:t>TRA/JSA belum disusun</a:t>
+            </a:r>
+            <a:endParaRPr lang="en-US" sz="1000" dirty="0"/>
+          </a:p>
+        </p:txBody>
+      </p:sp>
+      <p:sp>
+        <p:nvSpPr>
+          <p:cNvPr id="29" name="Shape 27"/>
+          <p:cNvSpPr/>
+          <p:nvPr/>
+        </p:nvSpPr>
+        <p:spPr>
+          <a:xfrm>
+            <a:off x="548640" y="4233672"/>
+            <a:ext cx="11091672" cy="365760"/>
+          </a:xfrm>
+          <a:prstGeom prst="rect">
+            <a:avLst/>
+          </a:prstGeom>
+          <a:solidFill>
+            <a:srgbClr val="F4F7FB"/>
+          </a:solidFill>
+          <a:ln/>
+        </p:spPr>
+      </p:sp>
+      <p:sp>
+        <p:nvSpPr>
+          <p:cNvPr id="30" name="Text 28"/>
+          <p:cNvSpPr txBox="1"/>
+          <p:nvPr/>
+        </p:nvSpPr>
+        <p:spPr>
+          <a:xfrm>
+            <a:off x="685800" y="4233672"/>
+            <a:ext cx="3154680" cy="365760"/>
+          </a:xfrm>
+          <a:prstGeom prst="rect">
+            <a:avLst/>
+          </a:prstGeom>
+          <a:noFill/>
+          <a:ln/>
+        </p:spPr>
+        <p:txBody>
+          <a:bodyPr wrap="square" lIns="0" tIns="0" rIns="0" bIns="0" rtlCol="0" anchor="ctr"/>
+          <a:lstStyle/>
+          <a:p>
+            <a:pPr indent="0" marL="0">
+              <a:buNone/>
+            </a:pPr>
+            <a:r>
+              <a:rPr lang="en-US" sz="1000" dirty="0">
+                <a:solidFill>
+                  <a:srgbClr val="002B5F"/>
+                </a:solidFill>
+                <a:latin typeface="Calibri" pitchFamily="34" charset="0"/>
+                <a:ea typeface="Calibri" pitchFamily="34" charset="-122"/>
+                <a:cs typeface="Calibri" pitchFamily="34" charset="-120"/>
+              </a:rPr>
+              <a:t>gate:net-registration</a:t>
+            </a:r>
+            <a:endParaRPr lang="en-US" sz="1000" dirty="0"/>
+          </a:p>
+        </p:txBody>
+      </p:sp>
+      <p:sp>
+        <p:nvSpPr>
+          <p:cNvPr id="31" name="Text 29"/>
+          <p:cNvSpPr txBox="1"/>
+          <p:nvPr/>
+        </p:nvSpPr>
+        <p:spPr>
+          <a:xfrm>
+            <a:off x="3977640" y="4233672"/>
+            <a:ext cx="2606040" cy="365760"/>
+          </a:xfrm>
+          <a:prstGeom prst="rect">
+            <a:avLst/>
+          </a:prstGeom>
+          <a:noFill/>
+          <a:ln/>
+        </p:spPr>
+        <p:txBody>
+          <a:bodyPr wrap="square" lIns="0" tIns="0" rIns="0" bIns="0" rtlCol="0" anchor="ctr"/>
+          <a:lstStyle/>
+          <a:p>
+            <a:pPr indent="0" marL="0">
+              <a:buNone/>
+            </a:pPr>
+            <a:r>
+              <a:rPr lang="en-US" sz="1000" dirty="0">
+                <a:solidFill>
+                  <a:srgbClr val="1A1F2B"/>
+                </a:solidFill>
+                <a:latin typeface="Calibri" pitchFamily="34" charset="0"/>
+                <a:ea typeface="Calibri" pitchFamily="34" charset="-122"/>
+                <a:cs typeface="Calibri" pitchFamily="34" charset="-120"/>
+              </a:rPr>
+              <a:t>Field Testing</a:t>
+            </a:r>
+            <a:endParaRPr lang="en-US" sz="1000" dirty="0"/>
+          </a:p>
+        </p:txBody>
+      </p:sp>
+      <p:sp>
+        <p:nvSpPr>
+          <p:cNvPr id="32" name="Text 30"/>
+          <p:cNvSpPr txBox="1"/>
+          <p:nvPr/>
+        </p:nvSpPr>
+        <p:spPr>
+          <a:xfrm>
+            <a:off x="6720840" y="4233672"/>
+            <a:ext cx="4919472" cy="365760"/>
+          </a:xfrm>
+          <a:prstGeom prst="rect">
+            <a:avLst/>
+          </a:prstGeom>
+          <a:noFill/>
+          <a:ln/>
+        </p:spPr>
+        <p:txBody>
+          <a:bodyPr wrap="square" lIns="0" tIns="0" rIns="0" bIns="0" rtlCol="0" anchor="ctr"/>
+          <a:lstStyle/>
+          <a:p>
+            <a:pPr indent="0" marL="0">
+              <a:buNone/>
+            </a:pPr>
+            <a:r>
+              <a:rPr lang="en-US" sz="1000" dirty="0">
+                <a:solidFill>
+                  <a:srgbClr val="1A1F2B"/>
+                </a:solidFill>
+                <a:latin typeface="Calibri" pitchFamily="34" charset="0"/>
+                <a:ea typeface="Calibri" pitchFamily="34" charset="-122"/>
+                <a:cs typeface="Calibri" pitchFamily="34" charset="-120"/>
+              </a:rPr>
+              <a:t>Selesai — jaringan field independen (LGU)</a:t>
+            </a:r>
+            <a:endParaRPr lang="en-US" sz="1000" dirty="0"/>
+          </a:p>
+        </p:txBody>
+      </p:sp>
+      <p:sp>
+        <p:nvSpPr>
+          <p:cNvPr id="33" name="Shape 31"/>
+          <p:cNvSpPr/>
+          <p:nvPr/>
+        </p:nvSpPr>
+        <p:spPr>
+          <a:xfrm>
+            <a:off x="548640" y="4626864"/>
+            <a:ext cx="11091672" cy="365760"/>
+          </a:xfrm>
+          <a:prstGeom prst="rect">
+            <a:avLst/>
+          </a:prstGeom>
+          <a:solidFill>
+            <a:srgbClr val="FFFFFF"/>
+          </a:solidFill>
+          <a:ln/>
+        </p:spPr>
+      </p:sp>
+      <p:sp>
+        <p:nvSpPr>
+          <p:cNvPr id="34" name="Text 32"/>
+          <p:cNvSpPr txBox="1"/>
+          <p:nvPr/>
+        </p:nvSpPr>
+        <p:spPr>
+          <a:xfrm>
+            <a:off x="685800" y="4626864"/>
+            <a:ext cx="3154680" cy="365760"/>
+          </a:xfrm>
+          <a:prstGeom prst="rect">
+            <a:avLst/>
+          </a:prstGeom>
+          <a:noFill/>
+          <a:ln/>
+        </p:spPr>
+        <p:txBody>
+          <a:bodyPr wrap="square" lIns="0" tIns="0" rIns="0" bIns="0" rtlCol="0" anchor="ctr"/>
+          <a:lstStyle/>
+          <a:p>
+            <a:pPr indent="0" marL="0">
+              <a:buNone/>
+            </a:pPr>
+            <a:r>
+              <a:rPr lang="en-US" sz="1000" dirty="0">
+                <a:solidFill>
+                  <a:srgbClr val="002B5F"/>
+                </a:solidFill>
+                <a:latin typeface="Calibri" pitchFamily="34" charset="0"/>
+                <a:ea typeface="Calibri" pitchFamily="34" charset="-122"/>
+                <a:cs typeface="Calibri" pitchFamily="34" charset="-120"/>
+              </a:rPr>
+              <a:t>gate:server-spec</a:t>
+            </a:r>
+            <a:endParaRPr lang="en-US" sz="1000" dirty="0"/>
+          </a:p>
+        </p:txBody>
+      </p:sp>
+      <p:sp>
+        <p:nvSpPr>
+          <p:cNvPr id="35" name="Text 33"/>
+          <p:cNvSpPr txBox="1"/>
+          <p:nvPr/>
+        </p:nvSpPr>
+        <p:spPr>
+          <a:xfrm>
+            <a:off x="3977640" y="4626864"/>
+            <a:ext cx="2606040" cy="365760"/>
+          </a:xfrm>
+          <a:prstGeom prst="rect">
+            <a:avLst/>
+          </a:prstGeom>
+          <a:noFill/>
+          <a:ln/>
+        </p:spPr>
+        <p:txBody>
+          <a:bodyPr wrap="square" lIns="0" tIns="0" rIns="0" bIns="0" rtlCol="0" anchor="ctr"/>
+          <a:lstStyle/>
+          <a:p>
+            <a:pPr indent="0" marL="0">
+              <a:buNone/>
+            </a:pPr>
+            <a:r>
+              <a:rPr lang="en-US" sz="1000" dirty="0">
+                <a:solidFill>
+                  <a:srgbClr val="1A1F2B"/>
+                </a:solidFill>
+                <a:latin typeface="Calibri" pitchFamily="34" charset="0"/>
+                <a:ea typeface="Calibri" pitchFamily="34" charset="-122"/>
+                <a:cs typeface="Calibri" pitchFamily="34" charset="-120"/>
+              </a:rPr>
+              <a:t>Field Testing</a:t>
+            </a:r>
+            <a:endParaRPr lang="en-US" sz="1000" dirty="0"/>
+          </a:p>
+        </p:txBody>
+      </p:sp>
+      <p:sp>
+        <p:nvSpPr>
+          <p:cNvPr id="36" name="Text 34"/>
+          <p:cNvSpPr txBox="1"/>
+          <p:nvPr/>
+        </p:nvSpPr>
+        <p:spPr>
+          <a:xfrm>
+            <a:off x="6720840" y="4626864"/>
+            <a:ext cx="4919472" cy="365760"/>
+          </a:xfrm>
+          <a:prstGeom prst="rect">
+            <a:avLst/>
+          </a:prstGeom>
+          <a:noFill/>
+          <a:ln/>
+        </p:spPr>
+        <p:txBody>
+          <a:bodyPr wrap="square" lIns="0" tIns="0" rIns="0" bIns="0" rtlCol="0" anchor="ctr"/>
+          <a:lstStyle/>
+          <a:p>
+            <a:pPr indent="0" marL="0">
+              <a:buNone/>
+            </a:pPr>
+            <a:r>
+              <a:rPr lang="en-US" sz="1000" dirty="0">
+                <a:solidFill>
+                  <a:srgbClr val="1A1F2B"/>
+                </a:solidFill>
+                <a:latin typeface="Calibri" pitchFamily="34" charset="0"/>
+                <a:ea typeface="Calibri" pitchFamily="34" charset="-122"/>
+                <a:cs typeface="Calibri" pitchFamily="34" charset="-120"/>
+              </a:rPr>
+              <a:t>Menunggu pengadaan PC fisik (bukan lagi soal jaringan)</a:t>
+            </a:r>
+            <a:endParaRPr lang="en-US" sz="1000" dirty="0"/>
+          </a:p>
+        </p:txBody>
+      </p:sp>
+      <p:sp>
+        <p:nvSpPr>
+          <p:cNvPr id="37" name="Shape 35"/>
+          <p:cNvSpPr/>
+          <p:nvPr/>
+        </p:nvSpPr>
+        <p:spPr>
+          <a:xfrm>
+            <a:off x="548640" y="5020056"/>
+            <a:ext cx="11091672" cy="365760"/>
+          </a:xfrm>
+          <a:prstGeom prst="rect">
+            <a:avLst/>
+          </a:prstGeom>
+          <a:solidFill>
+            <a:srgbClr val="F4F7FB"/>
+          </a:solidFill>
+          <a:ln/>
+        </p:spPr>
+      </p:sp>
+      <p:sp>
+        <p:nvSpPr>
+          <p:cNvPr id="38" name="Text 36"/>
+          <p:cNvSpPr txBox="1"/>
+          <p:nvPr/>
+        </p:nvSpPr>
+        <p:spPr>
+          <a:xfrm>
+            <a:off x="685800" y="5020056"/>
+            <a:ext cx="3154680" cy="365760"/>
+          </a:xfrm>
+          <a:prstGeom prst="rect">
+            <a:avLst/>
+          </a:prstGeom>
+          <a:noFill/>
+          <a:ln/>
+        </p:spPr>
+        <p:txBody>
+          <a:bodyPr wrap="square" lIns="0" tIns="0" rIns="0" bIns="0" rtlCol="0" anchor="ctr"/>
+          <a:lstStyle/>
+          <a:p>
+            <a:pPr indent="0" marL="0">
+              <a:buNone/>
+            </a:pPr>
+            <a:r>
+              <a:rPr lang="en-US" sz="1000" dirty="0">
+                <a:solidFill>
+                  <a:srgbClr val="002B5F"/>
+                </a:solidFill>
+                <a:latin typeface="Calibri" pitchFamily="34" charset="0"/>
+                <a:ea typeface="Calibri" pitchFamily="34" charset="-122"/>
+                <a:cs typeface="Calibri" pitchFamily="34" charset="-120"/>
+              </a:rPr>
+              <a:t>gate:solar-cert / bracket-tools</a:t>
+            </a:r>
+            <a:endParaRPr lang="en-US" sz="1000" dirty="0"/>
+          </a:p>
+        </p:txBody>
+      </p:sp>
+      <p:sp>
+        <p:nvSpPr>
+          <p:cNvPr id="39" name="Text 37"/>
+          <p:cNvSpPr txBox="1"/>
+          <p:nvPr/>
+        </p:nvSpPr>
+        <p:spPr>
+          <a:xfrm>
+            <a:off x="3977640" y="5020056"/>
+            <a:ext cx="2606040" cy="365760"/>
+          </a:xfrm>
+          <a:prstGeom prst="rect">
+            <a:avLst/>
+          </a:prstGeom>
+          <a:noFill/>
+          <a:ln/>
+        </p:spPr>
+        <p:txBody>
+          <a:bodyPr wrap="square" lIns="0" tIns="0" rIns="0" bIns="0" rtlCol="0" anchor="ctr"/>
+          <a:lstStyle/>
+          <a:p>
+            <a:pPr indent="0" marL="0">
+              <a:buNone/>
+            </a:pPr>
+            <a:r>
+              <a:rPr lang="en-US" sz="1000" dirty="0">
+                <a:solidFill>
+                  <a:srgbClr val="1A1F2B"/>
+                </a:solidFill>
+                <a:latin typeface="Calibri" pitchFamily="34" charset="0"/>
+                <a:ea typeface="Calibri" pitchFamily="34" charset="-122"/>
+                <a:cs typeface="Calibri" pitchFamily="34" charset="-120"/>
+              </a:rPr>
+              <a:t>Sertifikasi</a:t>
+            </a:r>
+            <a:endParaRPr lang="en-US" sz="1000" dirty="0"/>
+          </a:p>
+        </p:txBody>
+      </p:sp>
+      <p:sp>
+        <p:nvSpPr>
+          <p:cNvPr id="40" name="Text 38"/>
+          <p:cNvSpPr txBox="1"/>
+          <p:nvPr/>
+        </p:nvSpPr>
+        <p:spPr>
+          <a:xfrm>
+            <a:off x="6720840" y="5020056"/>
+            <a:ext cx="4919472" cy="365760"/>
+          </a:xfrm>
+          <a:prstGeom prst="rect">
+            <a:avLst/>
+          </a:prstGeom>
+          <a:noFill/>
+          <a:ln/>
+        </p:spPr>
+        <p:txBody>
+          <a:bodyPr wrap="square" lIns="0" tIns="0" rIns="0" bIns="0" rtlCol="0" anchor="ctr"/>
+          <a:lstStyle/>
+          <a:p>
+            <a:pPr indent="0" marL="0">
+              <a:buNone/>
+            </a:pPr>
+            <a:r>
+              <a:rPr lang="en-US" sz="1000" dirty="0">
+                <a:solidFill>
+                  <a:srgbClr val="1A1F2B"/>
+                </a:solidFill>
+                <a:latin typeface="Calibri" pitchFamily="34" charset="0"/>
+                <a:ea typeface="Calibri" pitchFamily="34" charset="-122"/>
+                <a:cs typeface="Calibri" pitchFamily="34" charset="-120"/>
+              </a:rPr>
+              <a:t>Belum disourcing / ditentukan</a:t>
+            </a:r>
+            <a:endParaRPr lang="en-US" sz="1000" dirty="0"/>
+          </a:p>
+        </p:txBody>
+      </p:sp>
+      <p:sp>
+        <p:nvSpPr>
+          <p:cNvPr id="41" name="Shape 39"/>
+          <p:cNvSpPr/>
+          <p:nvPr/>
+        </p:nvSpPr>
+        <p:spPr>
+          <a:xfrm>
+            <a:off x="548640" y="5550408"/>
+            <a:ext cx="11091672" cy="1051560"/>
+          </a:xfrm>
+          <a:prstGeom prst="roundRect">
+            <a:avLst>
+              <a:gd name="adj" fmla="val 6087"/>
+            </a:avLst>
+          </a:prstGeom>
+          <a:solidFill>
+            <a:srgbClr val="EAF1FB"/>
+          </a:solidFill>
+          <a:ln/>
+        </p:spPr>
+      </p:sp>
+      <p:sp>
+        <p:nvSpPr>
+          <p:cNvPr id="42" name="Text 40"/>
+          <p:cNvSpPr txBox="1"/>
+          <p:nvPr/>
+        </p:nvSpPr>
+        <p:spPr>
+          <a:xfrm>
+            <a:off x="822960" y="5669280"/>
+            <a:ext cx="10543032" cy="274320"/>
+          </a:xfrm>
+          <a:prstGeom prst="rect">
+            <a:avLst/>
+          </a:prstGeom>
+          <a:noFill/>
+          <a:ln/>
+        </p:spPr>
+        <p:txBody>
+          <a:bodyPr wrap="square" rtlCol="0" anchor="ctr"/>
+          <a:lstStyle/>
+          <a:p>
+            <a:pPr indent="0" marL="0">
+              <a:buNone/>
+            </a:pPr>
+            <a:r>
+              <a:rPr lang="en-US" sz="1200" b="1" dirty="0">
+                <a:solidFill>
+                  <a:srgbClr val="002B5F"/>
+                </a:solidFill>
+                <a:latin typeface="Calibri" pitchFamily="34" charset="0"/>
+                <a:ea typeface="Calibri" pitchFamily="34" charset="-122"/>
+                <a:cs typeface="Calibri" pitchFamily="34" charset="-120"/>
+              </a:rPr>
+              <a:t>Kolaborasi Field Test — RU VII Kasim/Sorong</a:t>
+            </a:r>
+            <a:endParaRPr lang="en-US" sz="1200" dirty="0"/>
+          </a:p>
+        </p:txBody>
+      </p:sp>
+      <p:sp>
+        <p:nvSpPr>
+          <p:cNvPr id="43" name="Text 41"/>
+          <p:cNvSpPr txBox="1"/>
+          <p:nvPr/>
+        </p:nvSpPr>
+        <p:spPr>
+          <a:xfrm>
+            <a:off x="822960" y="5961888"/>
+            <a:ext cx="10543032" cy="548640"/>
+          </a:xfrm>
+          <a:prstGeom prst="rect">
+            <a:avLst/>
+          </a:prstGeom>
+          <a:noFill/>
+          <a:ln/>
+        </p:spPr>
+        <p:txBody>
+          <a:bodyPr wrap="square" rtlCol="0" anchor="ctr"/>
+          <a:lstStyle/>
+          <a:p>
+            <a:pPr indent="0" marL="0">
+              <a:buNone/>
+            </a:pPr>
+            <a:r>
+              <a:rPr lang="en-US" sz="1050" dirty="0">
+                <a:solidFill>
+                  <a:srgbClr val="5B6B82"/>
+                </a:solidFill>
+                <a:latin typeface="Calibri" pitchFamily="34" charset="0"/>
+                <a:ea typeface="Calibri" pitchFamily="34" charset="-122"/>
+                <a:cs typeface="Calibri" pitchFamily="34" charset="-120"/>
+              </a:rPr>
+              <a:t>Kolaborasi field test berjalan paralel di RU VII Kasim/Sorong, dengan target implementasi Desember 2026 — sejalan dengan target implementasi program 9 bulan secara keseluruhan.</a:t>
+            </a:r>
+            <a:endParaRPr lang="en-US" sz="1050" dirty="0"/>
+          </a:p>
+        </p:txBody>
+      </p:sp>
+      <p:sp>
+        <p:nvSpPr>
+          <p:cNvPr id="44" name="Text 42"/>
+          <p:cNvSpPr/>
+          <p:nvPr/>
+        </p:nvSpPr>
+        <p:spPr>
+          <a:xfrm>
+            <a:off x="548640" y="6510528"/>
+            <a:ext cx="8229600" cy="274320"/>
+          </a:xfrm>
+          <a:prstGeom prst="rect">
+            <a:avLst/>
+          </a:prstGeom>
+          <a:noFill/>
+          <a:ln/>
+        </p:spPr>
+        <p:txBody>
+          <a:bodyPr wrap="square" rtlCol="0" anchor="ctr"/>
+          <a:lstStyle/>
+          <a:p>
+            <a:pPr indent="0" marL="0">
+              <a:buNone/>
+            </a:pPr>
+            <a:r>
+              <a:rPr lang="en-US" sz="900" dirty="0">
+                <a:solidFill>
+                  <a:srgbClr val="5B6B82"/>
+                </a:solidFill>
+                <a:latin typeface="Calibri" pitchFamily="34" charset="0"/>
+                <a:ea typeface="Calibri" pitchFamily="34" charset="-122"/>
+                <a:cs typeface="Calibri" pitchFamily="34" charset="-120"/>
+              </a:rPr>
+              <a:t>Gas Leak Detection System — LAPI Ganesha Utama x Lab IoT/Fisika ITB</a:t>
+            </a:r>
+            <a:endParaRPr lang="en-US" sz="900" dirty="0"/>
+          </a:p>
+        </p:txBody>
+      </p:sp>
+      <p:sp>
+        <p:nvSpPr>
+          <p:cNvPr id="45" name="Text 43"/>
+          <p:cNvSpPr/>
+          <p:nvPr/>
+        </p:nvSpPr>
+        <p:spPr>
+          <a:xfrm>
+            <a:off x="11091672" y="6510528"/>
+            <a:ext cx="548640" cy="274320"/>
+          </a:xfrm>
+          <a:prstGeom prst="rect">
+            <a:avLst/>
+          </a:prstGeom>
+          <a:noFill/>
+          <a:ln/>
+        </p:spPr>
+        <p:txBody>
+          <a:bodyPr wrap="square" rtlCol="0" anchor="ctr"/>
+          <a:lstStyle/>
+          <a:p>
+            <a:pPr algn="r" indent="0" marL="0">
+              <a:buNone/>
+            </a:pPr>
+            <a:r>
+              <a:rPr lang="en-US" sz="900" dirty="0">
+                <a:solidFill>
+                  <a:srgbClr val="5B6B82"/>
+                </a:solidFill>
+                <a:latin typeface="Calibri" pitchFamily="34" charset="0"/>
+                <a:ea typeface="Calibri" pitchFamily="34" charset="-122"/>
+                <a:cs typeface="Calibri" pitchFamily="34" charset="-120"/>
+              </a:rPr>
+              <a:t>7</a:t>
+            </a:r>
+            <a:endParaRPr lang="en-US" sz="900" dirty="0"/>
+          </a:p>
+        </p:txBody>
+      </p:sp>
+    </p:spTree>
+  </p:cSld>
+  <p:clrMapOvr>
+    <a:masterClrMapping/>
+  </p:clrMapOvr>
+</p:sld>
 </file>
 
 <file path=ppt/slides/slide8.xml><?xml version="1.0" encoding="utf-8"?>
